--- a/slides/pptx/week07.pptx
+++ b/slides/pptx/week07.pptx
@@ -685,7 +685,7 @@
           <a:p>
             <a:r>
               <a:rPr lang="en-US" dirty="0"/>
-              <a:t>Fast recap — cold-call one student per row to give the one-liner from memory. Don't lecture; it's retrieval practice. ~10 min.</a:t>
+              <a:t>Fast recap — cold-call one student per row to give the one-liner from memory. Don't lecture; it's retrieval practice. This column condenses each week's own graded OWASP/CWE scope, not a verbatim README quote — most weeks' READMEs carry a richer tag than this one-line abbreviation (e.g. Week 3's README also cites CWE-916/330, Week 6's also cites A07/CWE-287/321); Week 2's row spans all three of its graded categories (A05 injection, A04 weak hash, A02 secrets/misconfig) since no single category is the week's real content. ~10 min.</a:t>
             </a:r>
             <a:endParaRPr lang="en-US" dirty="0"/>
           </a:p>
@@ -861,7 +861,7 @@
           <a:p>
             <a:r>
               <a:rPr lang="en-US" dirty="0"/>
-              <a:t>Run the EXACT Week 9 format/timing (see mock-ctf.md) so the real CTF feels familiar. Circulate; offer hints that cost points. The point is calibration: they should leave knowing what they can/can't do. ~90 min.</a:t>
+              <a:t>Run the EXACT Week 9 format (see mock-ctf.md) so the real CTF feels familiar — but the TIMING is 150 min per AGENDA.md and mock-ctf.md itself, not 90; get this wrong on stage and the room's schedule breaks by an hour. Circulate; offer hints that cost points. The point is calibration: they should leave knowing what they can/can't do. ~150 min.</a:t>
             </a:r>
             <a:endParaRPr lang="en-US" dirty="0"/>
           </a:p>
@@ -1811,7 +1811,9 @@
           <a:ln/>
         </p:spPr>
         <p:txBody>
-          <a:bodyPr wrap="square" lIns="0" tIns="0" rIns="0" bIns="0" rtlCol="0" anchor="t"/>
+          <a:bodyPr wrap="square" lIns="0" tIns="0" rIns="0" bIns="0" rtlCol="0" anchor="t">
+            <a:normAutofit/>
+          </a:bodyPr>
           <a:lstStyle/>
           <a:p>
             <a:pPr marL="342900" indent="-342900">
@@ -2107,9 +2109,10 @@
             <a:tbl>
               <a:tblPr/>
               <a:tblGrid>
-                <a:gridCol w="2743200"/>
-                <a:gridCol w="2743200"/>
-                <a:gridCol w="2743200"/>
+                <a:gridCol w="2057400"/>
+                <a:gridCol w="2057400"/>
+                <a:gridCol w="2057400"/>
+                <a:gridCol w="2057400"/>
               </a:tblGrid>
               <a:tr h="420624">
                 <a:tc>
@@ -2188,6 +2191,67 @@
                           </a:solidFill>
                         </a:rPr>
                         <a:t>Topic</a:t>
+                      </a:r>
+                      <a:endParaRPr lang="en-US" sz="1250" dirty="0"/>
+                    </a:p>
+                  </a:txBody>
+                  <a:tcPr marL="76200" marR="76200" marT="38100" marB="38100" anchor="ctr">
+                    <a:lnL w="12700" cap="flat" cmpd="sng" algn="ctr">
+                      <a:solidFill>
+                        <a:srgbClr val="FFFFFF"/>
+                      </a:solidFill>
+                      <a:prstDash val="solid"/>
+                      <a:round/>
+                      <a:headEnd type="none" w="med" len="med"/>
+                      <a:tailEnd type="none" w="med" len="med"/>
+                    </a:lnL>
+                    <a:lnR w="12700" cap="flat" cmpd="sng" algn="ctr">
+                      <a:solidFill>
+                        <a:srgbClr val="FFFFFF"/>
+                      </a:solidFill>
+                      <a:prstDash val="solid"/>
+                      <a:round/>
+                      <a:headEnd type="none" w="med" len="med"/>
+                      <a:tailEnd type="none" w="med" len="med"/>
+                    </a:lnR>
+                    <a:lnT w="12700" cap="flat" cmpd="sng" algn="ctr">
+                      <a:solidFill>
+                        <a:srgbClr val="FFFFFF"/>
+                      </a:solidFill>
+                      <a:prstDash val="solid"/>
+                      <a:round/>
+                      <a:headEnd type="none" w="med" len="med"/>
+                      <a:tailEnd type="none" w="med" len="med"/>
+                    </a:lnT>
+                    <a:lnB w="12700" cap="flat" cmpd="sng" algn="ctr">
+                      <a:solidFill>
+                        <a:srgbClr val="FFFFFF"/>
+                      </a:solidFill>
+                      <a:prstDash val="solid"/>
+                      <a:round/>
+                      <a:headEnd type="none" w="med" len="med"/>
+                      <a:tailEnd type="none" w="med" len="med"/>
+                    </a:lnB>
+                    <a:solidFill>
+                      <a:srgbClr val="E35205"/>
+                    </a:solidFill>
+                  </a:tcPr>
+                </a:tc>
+                <a:tc>
+                  <a:txBody>
+                    <a:bodyPr/>
+                    <a:lstStyle/>
+                    <a:p>
+                      <a:pPr algn="l" indent="0" marL="0">
+                        <a:buNone/>
+                      </a:pPr>
+                      <a:r>
+                        <a:rPr lang="en-US" sz="1250" b="1" dirty="0">
+                          <a:solidFill>
+                            <a:srgbClr val="0E1726"/>
+                          </a:solidFill>
+                        </a:rPr>
+                        <a:t>OWASP/CWE</a:t>
                       </a:r>
                       <a:endParaRPr lang="en-US" sz="1250" dirty="0"/>
                     </a:p>
@@ -2433,6 +2497,67 @@
                             <a:srgbClr val="1F2937"/>
                           </a:solidFill>
                         </a:rPr>
+                        <a:t>A06, CWE-501</a:t>
+                      </a:r>
+                      <a:endParaRPr lang="en-US" sz="1200" dirty="0"/>
+                    </a:p>
+                  </a:txBody>
+                  <a:tcPr marL="76200" marR="76200" marT="38100" marB="38100" anchor="ctr">
+                    <a:lnL w="12700" cap="flat" cmpd="sng" algn="ctr">
+                      <a:solidFill>
+                        <a:srgbClr val="FFFFFF"/>
+                      </a:solidFill>
+                      <a:prstDash val="solid"/>
+                      <a:round/>
+                      <a:headEnd type="none" w="med" len="med"/>
+                      <a:tailEnd type="none" w="med" len="med"/>
+                    </a:lnL>
+                    <a:lnR w="12700" cap="flat" cmpd="sng" algn="ctr">
+                      <a:solidFill>
+                        <a:srgbClr val="FFFFFF"/>
+                      </a:solidFill>
+                      <a:prstDash val="solid"/>
+                      <a:round/>
+                      <a:headEnd type="none" w="med" len="med"/>
+                      <a:tailEnd type="none" w="med" len="med"/>
+                    </a:lnR>
+                    <a:lnT w="12700" cap="flat" cmpd="sng" algn="ctr">
+                      <a:solidFill>
+                        <a:srgbClr val="FFFFFF"/>
+                      </a:solidFill>
+                      <a:prstDash val="solid"/>
+                      <a:round/>
+                      <a:headEnd type="none" w="med" len="med"/>
+                      <a:tailEnd type="none" w="med" len="med"/>
+                    </a:lnT>
+                    <a:lnB w="12700" cap="flat" cmpd="sng" algn="ctr">
+                      <a:solidFill>
+                        <a:srgbClr val="FFFFFF"/>
+                      </a:solidFill>
+                      <a:prstDash val="solid"/>
+                      <a:round/>
+                      <a:headEnd type="none" w="med" len="med"/>
+                      <a:tailEnd type="none" w="med" len="med"/>
+                    </a:lnB>
+                    <a:solidFill>
+                      <a:srgbClr val="F1F5F9"/>
+                    </a:solidFill>
+                  </a:tcPr>
+                </a:tc>
+                <a:tc>
+                  <a:txBody>
+                    <a:bodyPr/>
+                    <a:lstStyle/>
+                    <a:p>
+                      <a:pPr algn="l" indent="0" marL="0">
+                        <a:buNone/>
+                      </a:pPr>
+                      <a:r>
+                        <a:rPr lang="en-US" sz="1200" dirty="0">
+                          <a:solidFill>
+                            <a:srgbClr val="1F2937"/>
+                          </a:solidFill>
+                        </a:rPr>
                         <a:t>think like an attacker; STRIDE</a:t>
                       </a:r>
                       <a:endParaRPr lang="en-US" sz="1200" dirty="0"/>
@@ -2618,6 +2743,67 @@
                             <a:srgbClr val="1F2937"/>
                           </a:solidFill>
                         </a:rPr>
+                        <a:t>A02/04/05, CWE-89/78/327/798</a:t>
+                      </a:r>
+                      <a:endParaRPr lang="en-US" sz="1200" dirty="0"/>
+                    </a:p>
+                  </a:txBody>
+                  <a:tcPr marL="76200" marR="76200" marT="38100" marB="38100" anchor="ctr">
+                    <a:lnL w="12700" cap="flat" cmpd="sng" algn="ctr">
+                      <a:solidFill>
+                        <a:srgbClr val="FFFFFF"/>
+                      </a:solidFill>
+                      <a:prstDash val="solid"/>
+                      <a:round/>
+                      <a:headEnd type="none" w="med" len="med"/>
+                      <a:tailEnd type="none" w="med" len="med"/>
+                    </a:lnL>
+                    <a:lnR w="12700" cap="flat" cmpd="sng" algn="ctr">
+                      <a:solidFill>
+                        <a:srgbClr val="FFFFFF"/>
+                      </a:solidFill>
+                      <a:prstDash val="solid"/>
+                      <a:round/>
+                      <a:headEnd type="none" w="med" len="med"/>
+                      <a:tailEnd type="none" w="med" len="med"/>
+                    </a:lnR>
+                    <a:lnT w="12700" cap="flat" cmpd="sng" algn="ctr">
+                      <a:solidFill>
+                        <a:srgbClr val="FFFFFF"/>
+                      </a:solidFill>
+                      <a:prstDash val="solid"/>
+                      <a:round/>
+                      <a:headEnd type="none" w="med" len="med"/>
+                      <a:tailEnd type="none" w="med" len="med"/>
+                    </a:lnT>
+                    <a:lnB w="12700" cap="flat" cmpd="sng" algn="ctr">
+                      <a:solidFill>
+                        <a:srgbClr val="FFFFFF"/>
+                      </a:solidFill>
+                      <a:prstDash val="solid"/>
+                      <a:round/>
+                      <a:headEnd type="none" w="med" len="med"/>
+                      <a:tailEnd type="none" w="med" len="med"/>
+                    </a:lnB>
+                    <a:solidFill>
+                      <a:srgbClr val="E8EDF3"/>
+                    </a:solidFill>
+                  </a:tcPr>
+                </a:tc>
+                <a:tc>
+                  <a:txBody>
+                    <a:bodyPr/>
+                    <a:lstStyle/>
+                    <a:p>
+                      <a:pPr algn="l" indent="0" marL="0">
+                        <a:buNone/>
+                      </a:pPr>
+                      <a:r>
+                        <a:rPr lang="en-US" sz="1200" dirty="0">
+                          <a:solidFill>
+                            <a:srgbClr val="1F2937"/>
+                          </a:solidFill>
+                        </a:rPr>
                         <a:t>SAST/DAST/SCA/fuzzing; shift left</a:t>
                       </a:r>
                       <a:endParaRPr lang="en-US" sz="1200" dirty="0"/>
@@ -2803,6 +2989,67 @@
                             <a:srgbClr val="1F2937"/>
                           </a:solidFill>
                         </a:rPr>
+                        <a:t>A04, CWE-327</a:t>
+                      </a:r>
+                      <a:endParaRPr lang="en-US" sz="1200" dirty="0"/>
+                    </a:p>
+                  </a:txBody>
+                  <a:tcPr marL="76200" marR="76200" marT="38100" marB="38100" anchor="ctr">
+                    <a:lnL w="12700" cap="flat" cmpd="sng" algn="ctr">
+                      <a:solidFill>
+                        <a:srgbClr val="FFFFFF"/>
+                      </a:solidFill>
+                      <a:prstDash val="solid"/>
+                      <a:round/>
+                      <a:headEnd type="none" w="med" len="med"/>
+                      <a:tailEnd type="none" w="med" len="med"/>
+                    </a:lnL>
+                    <a:lnR w="12700" cap="flat" cmpd="sng" algn="ctr">
+                      <a:solidFill>
+                        <a:srgbClr val="FFFFFF"/>
+                      </a:solidFill>
+                      <a:prstDash val="solid"/>
+                      <a:round/>
+                      <a:headEnd type="none" w="med" len="med"/>
+                      <a:tailEnd type="none" w="med" len="med"/>
+                    </a:lnR>
+                    <a:lnT w="12700" cap="flat" cmpd="sng" algn="ctr">
+                      <a:solidFill>
+                        <a:srgbClr val="FFFFFF"/>
+                      </a:solidFill>
+                      <a:prstDash val="solid"/>
+                      <a:round/>
+                      <a:headEnd type="none" w="med" len="med"/>
+                      <a:tailEnd type="none" w="med" len="med"/>
+                    </a:lnT>
+                    <a:lnB w="12700" cap="flat" cmpd="sng" algn="ctr">
+                      <a:solidFill>
+                        <a:srgbClr val="FFFFFF"/>
+                      </a:solidFill>
+                      <a:prstDash val="solid"/>
+                      <a:round/>
+                      <a:headEnd type="none" w="med" len="med"/>
+                      <a:tailEnd type="none" w="med" len="med"/>
+                    </a:lnB>
+                    <a:solidFill>
+                      <a:srgbClr val="F1F5F9"/>
+                    </a:solidFill>
+                  </a:tcPr>
+                </a:tc>
+                <a:tc>
+                  <a:txBody>
+                    <a:bodyPr/>
+                    <a:lstStyle/>
+                    <a:p>
+                      <a:pPr algn="l" indent="0" marL="0">
+                        <a:buNone/>
+                      </a:pPr>
+                      <a:r>
+                        <a:rPr lang="en-US" sz="1200" dirty="0">
+                          <a:solidFill>
+                            <a:srgbClr val="1F2937"/>
+                          </a:solidFill>
+                        </a:rPr>
                         <a:t>KDFs, AEAD; avoid ECB/MD5</a:t>
                       </a:r>
                       <a:endParaRPr lang="en-US" sz="1200" dirty="0"/>
@@ -2988,6 +3235,67 @@
                             <a:srgbClr val="1F2937"/>
                           </a:solidFill>
                         </a:rPr>
+                        <a:t>A05, CWE-89/78/434</a:t>
+                      </a:r>
+                      <a:endParaRPr lang="en-US" sz="1200" dirty="0"/>
+                    </a:p>
+                  </a:txBody>
+                  <a:tcPr marL="76200" marR="76200" marT="38100" marB="38100" anchor="ctr">
+                    <a:lnL w="12700" cap="flat" cmpd="sng" algn="ctr">
+                      <a:solidFill>
+                        <a:srgbClr val="FFFFFF"/>
+                      </a:solidFill>
+                      <a:prstDash val="solid"/>
+                      <a:round/>
+                      <a:headEnd type="none" w="med" len="med"/>
+                      <a:tailEnd type="none" w="med" len="med"/>
+                    </a:lnL>
+                    <a:lnR w="12700" cap="flat" cmpd="sng" algn="ctr">
+                      <a:solidFill>
+                        <a:srgbClr val="FFFFFF"/>
+                      </a:solidFill>
+                      <a:prstDash val="solid"/>
+                      <a:round/>
+                      <a:headEnd type="none" w="med" len="med"/>
+                      <a:tailEnd type="none" w="med" len="med"/>
+                    </a:lnR>
+                    <a:lnT w="12700" cap="flat" cmpd="sng" algn="ctr">
+                      <a:solidFill>
+                        <a:srgbClr val="FFFFFF"/>
+                      </a:solidFill>
+                      <a:prstDash val="solid"/>
+                      <a:round/>
+                      <a:headEnd type="none" w="med" len="med"/>
+                      <a:tailEnd type="none" w="med" len="med"/>
+                    </a:lnT>
+                    <a:lnB w="12700" cap="flat" cmpd="sng" algn="ctr">
+                      <a:solidFill>
+                        <a:srgbClr val="FFFFFF"/>
+                      </a:solidFill>
+                      <a:prstDash val="solid"/>
+                      <a:round/>
+                      <a:headEnd type="none" w="med" len="med"/>
+                      <a:tailEnd type="none" w="med" len="med"/>
+                    </a:lnB>
+                    <a:solidFill>
+                      <a:srgbClr val="E8EDF3"/>
+                    </a:solidFill>
+                  </a:tcPr>
+                </a:tc>
+                <a:tc>
+                  <a:txBody>
+                    <a:bodyPr/>
+                    <a:lstStyle/>
+                    <a:p>
+                      <a:pPr algn="l" indent="0" marL="0">
+                        <a:buNone/>
+                      </a:pPr>
+                      <a:r>
+                        <a:rPr lang="en-US" sz="1200" dirty="0">
+                          <a:solidFill>
+                            <a:srgbClr val="1F2937"/>
+                          </a:solidFill>
+                        </a:rPr>
                         <a:t>data ≠ code; parameterize</a:t>
                       </a:r>
                       <a:endParaRPr lang="en-US" sz="1200" dirty="0"/>
@@ -3173,6 +3481,67 @@
                             <a:srgbClr val="1F2937"/>
                           </a:solidFill>
                         </a:rPr>
+                        <a:t>A05, CWE-79/352</a:t>
+                      </a:r>
+                      <a:endParaRPr lang="en-US" sz="1200" dirty="0"/>
+                    </a:p>
+                  </a:txBody>
+                  <a:tcPr marL="76200" marR="76200" marT="38100" marB="38100" anchor="ctr">
+                    <a:lnL w="12700" cap="flat" cmpd="sng" algn="ctr">
+                      <a:solidFill>
+                        <a:srgbClr val="FFFFFF"/>
+                      </a:solidFill>
+                      <a:prstDash val="solid"/>
+                      <a:round/>
+                      <a:headEnd type="none" w="med" len="med"/>
+                      <a:tailEnd type="none" w="med" len="med"/>
+                    </a:lnL>
+                    <a:lnR w="12700" cap="flat" cmpd="sng" algn="ctr">
+                      <a:solidFill>
+                        <a:srgbClr val="FFFFFF"/>
+                      </a:solidFill>
+                      <a:prstDash val="solid"/>
+                      <a:round/>
+                      <a:headEnd type="none" w="med" len="med"/>
+                      <a:tailEnd type="none" w="med" len="med"/>
+                    </a:lnR>
+                    <a:lnT w="12700" cap="flat" cmpd="sng" algn="ctr">
+                      <a:solidFill>
+                        <a:srgbClr val="FFFFFF"/>
+                      </a:solidFill>
+                      <a:prstDash val="solid"/>
+                      <a:round/>
+                      <a:headEnd type="none" w="med" len="med"/>
+                      <a:tailEnd type="none" w="med" len="med"/>
+                    </a:lnT>
+                    <a:lnB w="12700" cap="flat" cmpd="sng" algn="ctr">
+                      <a:solidFill>
+                        <a:srgbClr val="FFFFFF"/>
+                      </a:solidFill>
+                      <a:prstDash val="solid"/>
+                      <a:round/>
+                      <a:headEnd type="none" w="med" len="med"/>
+                      <a:tailEnd type="none" w="med" len="med"/>
+                    </a:lnB>
+                    <a:solidFill>
+                      <a:srgbClr val="F1F5F9"/>
+                    </a:solidFill>
+                  </a:tcPr>
+                </a:tc>
+                <a:tc>
+                  <a:txBody>
+                    <a:bodyPr/>
+                    <a:lstStyle/>
+                    <a:p>
+                      <a:pPr algn="l" indent="0" marL="0">
+                        <a:buNone/>
+                      </a:pPr>
+                      <a:r>
+                        <a:rPr lang="en-US" sz="1200" dirty="0">
+                          <a:solidFill>
+                            <a:srgbClr val="1F2937"/>
+                          </a:solidFill>
+                        </a:rPr>
                         <a:t>encode per context; CSP</a:t>
                       </a:r>
                       <a:endParaRPr lang="en-US" sz="1200" dirty="0"/>
@@ -3298,6 +3667,67 @@
                           </a:solidFill>
                         </a:rPr>
                         <a:t>Auth &amp; access</a:t>
+                      </a:r>
+                      <a:endParaRPr lang="en-US" sz="1200" dirty="0"/>
+                    </a:p>
+                  </a:txBody>
+                  <a:tcPr marL="76200" marR="76200" marT="38100" marB="38100" anchor="ctr">
+                    <a:lnL w="12700" cap="flat" cmpd="sng" algn="ctr">
+                      <a:solidFill>
+                        <a:srgbClr val="FFFFFF"/>
+                      </a:solidFill>
+                      <a:prstDash val="solid"/>
+                      <a:round/>
+                      <a:headEnd type="none" w="med" len="med"/>
+                      <a:tailEnd type="none" w="med" len="med"/>
+                    </a:lnL>
+                    <a:lnR w="12700" cap="flat" cmpd="sng" algn="ctr">
+                      <a:solidFill>
+                        <a:srgbClr val="FFFFFF"/>
+                      </a:solidFill>
+                      <a:prstDash val="solid"/>
+                      <a:round/>
+                      <a:headEnd type="none" w="med" len="med"/>
+                      <a:tailEnd type="none" w="med" len="med"/>
+                    </a:lnR>
+                    <a:lnT w="12700" cap="flat" cmpd="sng" algn="ctr">
+                      <a:solidFill>
+                        <a:srgbClr val="FFFFFF"/>
+                      </a:solidFill>
+                      <a:prstDash val="solid"/>
+                      <a:round/>
+                      <a:headEnd type="none" w="med" len="med"/>
+                      <a:tailEnd type="none" w="med" len="med"/>
+                    </a:lnT>
+                    <a:lnB w="12700" cap="flat" cmpd="sng" algn="ctr">
+                      <a:solidFill>
+                        <a:srgbClr val="FFFFFF"/>
+                      </a:solidFill>
+                      <a:prstDash val="solid"/>
+                      <a:round/>
+                      <a:headEnd type="none" w="med" len="med"/>
+                      <a:tailEnd type="none" w="med" len="med"/>
+                    </a:lnB>
+                    <a:solidFill>
+                      <a:srgbClr val="E8EDF3"/>
+                    </a:solidFill>
+                  </a:tcPr>
+                </a:tc>
+                <a:tc>
+                  <a:txBody>
+                    <a:bodyPr/>
+                    <a:lstStyle/>
+                    <a:p>
+                      <a:pPr algn="l" indent="0" marL="0">
+                        <a:buNone/>
+                      </a:pPr>
+                      <a:r>
+                        <a:rPr lang="en-US" sz="1200" dirty="0">
+                          <a:solidFill>
+                            <a:srgbClr val="1F2937"/>
+                          </a:solidFill>
+                        </a:rPr>
+                        <a:t>A01, CWE-639/347</a:t>
                       </a:r>
                       <a:endParaRPr lang="en-US" sz="1200" dirty="0"/>
                     </a:p>
@@ -3613,7 +4043,9 @@
           <a:ln/>
         </p:spPr>
         <p:txBody>
-          <a:bodyPr wrap="square" lIns="0" tIns="0" rIns="0" bIns="0" rtlCol="0" anchor="t"/>
+          <a:bodyPr wrap="square" lIns="0" tIns="0" rIns="0" bIns="0" rtlCol="0" anchor="t">
+            <a:normAutofit/>
+          </a:bodyPr>
           <a:lstStyle/>
           <a:p>
             <a:pPr indent="0" marL="0">
@@ -4239,7 +4671,9 @@
           <a:ln/>
         </p:spPr>
         <p:txBody>
-          <a:bodyPr wrap="square" lIns="0" tIns="0" rIns="0" bIns="0" rtlCol="0" anchor="t"/>
+          <a:bodyPr wrap="square" lIns="0" tIns="0" rIns="0" bIns="0" rtlCol="0" anchor="t">
+            <a:normAutofit/>
+          </a:bodyPr>
           <a:lstStyle/>
           <a:p>
             <a:pPr indent="0" marL="0">
@@ -4254,7 +4688,7 @@
                 <a:ea typeface="Calibri" pitchFamily="34" charset="-122"/>
                 <a:cs typeface="Calibri" pitchFamily="34" charset="-120"/>
               </a:rPr>
-              <a:t>Same format as Week 9:</a:t>
+              <a:t>Same format as Week 9, 6 challenges, ~150 min:</a:t>
             </a:r>
             <a:endParaRPr lang="en-US" sz="1400" dirty="0"/>
           </a:p>
@@ -4269,11 +4703,11 @@
         <p:spPr>
           <a:xfrm>
             <a:off x="457200" y="1965960"/>
-            <a:ext cx="8229600" cy="1517904"/>
+            <a:ext cx="8229600" cy="1719072"/>
           </a:xfrm>
           <a:prstGeom prst="roundRect">
             <a:avLst>
-              <a:gd name="adj" fmla="val 4819"/>
+              <a:gd name="adj" fmla="val 4255"/>
             </a:avLst>
           </a:prstGeom>
           <a:solidFill>
@@ -4298,7 +4732,7 @@
         <p:spPr>
           <a:xfrm>
             <a:off x="731520" y="2075688"/>
-            <a:ext cx="7680960" cy="1298448"/>
+            <a:ext cx="7680960" cy="1499616"/>
           </a:xfrm>
           <a:prstGeom prst="rect">
             <a:avLst/>
@@ -4307,7 +4741,9 @@
           <a:ln/>
         </p:spPr>
         <p:txBody>
-          <a:bodyPr wrap="square" lIns="0" tIns="0" rIns="0" bIns="0" rtlCol="0" anchor="t"/>
+          <a:bodyPr wrap="square" lIns="0" tIns="0" rIns="0" bIns="0" rtlCol="0" anchor="t">
+            <a:normAutofit/>
+          </a:bodyPr>
           <a:lstStyle/>
           <a:p>
             <a:pPr marL="342900" indent="-342900">
@@ -4347,7 +4783,7 @@
                 <a:ea typeface="Calibri" pitchFamily="34" charset="-122"/>
                 <a:cs typeface="Calibri" pitchFamily="34" charset="-120"/>
               </a:rPr>
-              <a:t>XSS (reflected/stored/DOM)</a:t>
+              <a:t>XSS (stored only — reflected/DOM aren't in this mock)</a:t>
             </a:r>
             <a:endParaRPr lang="en-US" sz="1400" dirty="0"/>
           </a:p>
@@ -4389,7 +4825,7 @@
                 <a:ea typeface="Calibri" pitchFamily="34" charset="-122"/>
                 <a:cs typeface="Calibri" pitchFamily="34" charset="-120"/>
               </a:rPr>
-              <a:t>Crypto (crack a hash / ECB oracle)</a:t>
+              <a:t>Crypto (crack a hash — the ECB oracle is a Week 3 lab task, not part of this mock)</a:t>
             </a:r>
             <a:endParaRPr lang="en-US" sz="1400" dirty="0"/>
           </a:p>
@@ -4403,12 +4839,12 @@
         </p:nvSpPr>
         <p:spPr>
           <a:xfrm>
-            <a:off x="457200" y="3648456"/>
-            <a:ext cx="8229600" cy="822960"/>
+            <a:off x="457200" y="3849624"/>
+            <a:ext cx="8229600" cy="722376"/>
           </a:xfrm>
           <a:prstGeom prst="roundRect">
             <a:avLst>
-              <a:gd name="adj" fmla="val 8889"/>
+              <a:gd name="adj" fmla="val 10127"/>
             </a:avLst>
           </a:prstGeom>
           <a:solidFill>
@@ -4425,8 +4861,8 @@
         </p:nvSpPr>
         <p:spPr>
           <a:xfrm>
-            <a:off x="731520" y="3648456"/>
-            <a:ext cx="7680960" cy="822960"/>
+            <a:off x="731520" y="3849624"/>
+            <a:ext cx="7680960" cy="722376"/>
           </a:xfrm>
           <a:prstGeom prst="rect">
             <a:avLst/>
@@ -4435,7 +4871,9 @@
           <a:ln/>
         </p:spPr>
         <p:txBody>
-          <a:bodyPr wrap="square" lIns="0" tIns="0" rIns="0" bIns="0" rtlCol="0" anchor="ctr"/>
+          <a:bodyPr wrap="square" lIns="0" tIns="0" rIns="0" bIns="0" rtlCol="0" anchor="ctr">
+            <a:normAutofit/>
+          </a:bodyPr>
           <a:lstStyle/>
           <a:p>
             <a:pPr indent="0" marL="0">
@@ -4688,7 +5126,9 @@
           <a:ln/>
         </p:spPr>
         <p:txBody>
-          <a:bodyPr wrap="square" lIns="0" tIns="0" rIns="0" bIns="0" rtlCol="0" anchor="t"/>
+          <a:bodyPr wrap="square" lIns="0" tIns="0" rIns="0" bIns="0" rtlCol="0" anchor="t">
+            <a:normAutofit/>
+          </a:bodyPr>
           <a:lstStyle/>
           <a:p>
             <a:pPr marL="342900" indent="-342900">
@@ -4970,7 +5410,7 @@
         <p:spPr>
           <a:xfrm>
             <a:off x="548640" y="1325880"/>
-            <a:ext cx="8046720" cy="548640"/>
+            <a:ext cx="8046720" cy="822960"/>
           </a:xfrm>
           <a:prstGeom prst="rect">
             <a:avLst/>
@@ -4979,7 +5419,9 @@
           <a:ln/>
         </p:spPr>
         <p:txBody>
-          <a:bodyPr wrap="square" lIns="0" tIns="0" rIns="0" bIns="0" rtlCol="0" anchor="t"/>
+          <a:bodyPr wrap="square" lIns="0" tIns="0" rIns="0" bIns="0" rtlCol="0" anchor="t">
+            <a:normAutofit/>
+          </a:bodyPr>
           <a:lstStyle/>
           <a:p>
             <a:pPr indent="0" marL="0">

--- a/slides/pptx/week07.pptx
+++ b/slides/pptx/week07.pptx
@@ -685,7 +685,7 @@
           <a:p>
             <a:r>
               <a:rPr lang="en-US" dirty="0"/>
-              <a:t>Fast recap — cold-call one student per row to give the one-liner from memory. Don't lecture; it's retrieval practice. This column condenses each week's own graded OWASP/CWE scope, not a verbatim README quote — most weeks' READMEs carry a richer tag than this one-line abbreviation (e.g. Week 3's README also cites CWE-916/330, Week 6's also cites A07/CWE-287/321); Week 2's row spans all three of its graded categories (A05 injection, A04 weak hash, A02 secrets/misconfig) since no single category is the week's real content. ~10 min.</a:t>
+              <a:t>Fast recap — cold-call one student per row to give the one-liner from memory. Don't lecture; it's retrieval practice. Same unifying shape as Week 1's own trust-boundary concept: input crosses, a control sits at the crossing — the map makes that pattern visible across all 6 weeks at once, not just stated per week. ~10 min.</a:t>
             </a:r>
             <a:endParaRPr lang="en-US" dirty="0"/>
           </a:p>
@@ -2086,1763 +2086,50 @@
           </a:p>
         </p:txBody>
       </p:sp>
-      <p:graphicFrame>
-        <p:nvGraphicFramePr>
-          <p:cNvPr id="4" name="Table 0"/>
-          <p:cNvGraphicFramePr>
-            <a:graphicFrameLocks noGrp="1"/>
-          </p:cNvGraphicFramePr>
-          <p:nvPr>
-            <p:extLst>
-              <p:ext uri="{D42A27DB-BD31-4B8C-83A1-F6EECF244321}">
-                <p14:modId xmlns:p14="http://schemas.microsoft.com/office/powerpoint/2010/main" val="1579011935"/>
-              </p:ext>
-            </p:extLst>
-          </p:nvPr>
-        </p:nvGraphicFramePr>
-        <p:xfrm>
-          <a:off x="457200" y="1325880"/>
-          <a:ext cx="8229600" cy="914400"/>
-        </p:xfrm>
-        <a:graphic>
-          <a:graphicData uri="http://schemas.openxmlformats.org/drawingml/2006/table">
-            <a:tbl>
-              <a:tblPr/>
-              <a:tblGrid>
-                <a:gridCol w="2057400"/>
-                <a:gridCol w="2057400"/>
-                <a:gridCol w="2057400"/>
-                <a:gridCol w="2057400"/>
-              </a:tblGrid>
-              <a:tr h="420624">
-                <a:tc>
-                  <a:txBody>
-                    <a:bodyPr/>
-                    <a:lstStyle/>
-                    <a:p>
-                      <a:pPr algn="l" indent="0" marL="0">
-                        <a:buNone/>
-                      </a:pPr>
-                      <a:r>
-                        <a:rPr lang="en-US" sz="1250" b="1" dirty="0">
-                          <a:solidFill>
-                            <a:srgbClr val="0E1726"/>
-                          </a:solidFill>
-                        </a:rPr>
-                        <a:t>Wk</a:t>
-                      </a:r>
-                      <a:endParaRPr lang="en-US" sz="1250" dirty="0"/>
-                    </a:p>
-                  </a:txBody>
-                  <a:tcPr marL="76200" marR="76200" marT="38100" marB="38100" anchor="ctr">
-                    <a:lnL w="12700" cap="flat" cmpd="sng" algn="ctr">
-                      <a:solidFill>
-                        <a:srgbClr val="FFFFFF"/>
-                      </a:solidFill>
-                      <a:prstDash val="solid"/>
-                      <a:round/>
-                      <a:headEnd type="none" w="med" len="med"/>
-                      <a:tailEnd type="none" w="med" len="med"/>
-                    </a:lnL>
-                    <a:lnR w="12700" cap="flat" cmpd="sng" algn="ctr">
-                      <a:solidFill>
-                        <a:srgbClr val="FFFFFF"/>
-                      </a:solidFill>
-                      <a:prstDash val="solid"/>
-                      <a:round/>
-                      <a:headEnd type="none" w="med" len="med"/>
-                      <a:tailEnd type="none" w="med" len="med"/>
-                    </a:lnR>
-                    <a:lnT w="12700" cap="flat" cmpd="sng" algn="ctr">
-                      <a:solidFill>
-                        <a:srgbClr val="FFFFFF"/>
-                      </a:solidFill>
-                      <a:prstDash val="solid"/>
-                      <a:round/>
-                      <a:headEnd type="none" w="med" len="med"/>
-                      <a:tailEnd type="none" w="med" len="med"/>
-                    </a:lnT>
-                    <a:lnB w="12700" cap="flat" cmpd="sng" algn="ctr">
-                      <a:solidFill>
-                        <a:srgbClr val="FFFFFF"/>
-                      </a:solidFill>
-                      <a:prstDash val="solid"/>
-                      <a:round/>
-                      <a:headEnd type="none" w="med" len="med"/>
-                      <a:tailEnd type="none" w="med" len="med"/>
-                    </a:lnB>
-                    <a:solidFill>
-                      <a:srgbClr val="E35205"/>
-                    </a:solidFill>
-                  </a:tcPr>
-                </a:tc>
-                <a:tc>
-                  <a:txBody>
-                    <a:bodyPr/>
-                    <a:lstStyle/>
-                    <a:p>
-                      <a:pPr algn="l" indent="0" marL="0">
-                        <a:buNone/>
-                      </a:pPr>
-                      <a:r>
-                        <a:rPr lang="en-US" sz="1250" b="1" dirty="0">
-                          <a:solidFill>
-                            <a:srgbClr val="0E1726"/>
-                          </a:solidFill>
-                        </a:rPr>
-                        <a:t>Topic</a:t>
-                      </a:r>
-                      <a:endParaRPr lang="en-US" sz="1250" dirty="0"/>
-                    </a:p>
-                  </a:txBody>
-                  <a:tcPr marL="76200" marR="76200" marT="38100" marB="38100" anchor="ctr">
-                    <a:lnL w="12700" cap="flat" cmpd="sng" algn="ctr">
-                      <a:solidFill>
-                        <a:srgbClr val="FFFFFF"/>
-                      </a:solidFill>
-                      <a:prstDash val="solid"/>
-                      <a:round/>
-                      <a:headEnd type="none" w="med" len="med"/>
-                      <a:tailEnd type="none" w="med" len="med"/>
-                    </a:lnL>
-                    <a:lnR w="12700" cap="flat" cmpd="sng" algn="ctr">
-                      <a:solidFill>
-                        <a:srgbClr val="FFFFFF"/>
-                      </a:solidFill>
-                      <a:prstDash val="solid"/>
-                      <a:round/>
-                      <a:headEnd type="none" w="med" len="med"/>
-                      <a:tailEnd type="none" w="med" len="med"/>
-                    </a:lnR>
-                    <a:lnT w="12700" cap="flat" cmpd="sng" algn="ctr">
-                      <a:solidFill>
-                        <a:srgbClr val="FFFFFF"/>
-                      </a:solidFill>
-                      <a:prstDash val="solid"/>
-                      <a:round/>
-                      <a:headEnd type="none" w="med" len="med"/>
-                      <a:tailEnd type="none" w="med" len="med"/>
-                    </a:lnT>
-                    <a:lnB w="12700" cap="flat" cmpd="sng" algn="ctr">
-                      <a:solidFill>
-                        <a:srgbClr val="FFFFFF"/>
-                      </a:solidFill>
-                      <a:prstDash val="solid"/>
-                      <a:round/>
-                      <a:headEnd type="none" w="med" len="med"/>
-                      <a:tailEnd type="none" w="med" len="med"/>
-                    </a:lnB>
-                    <a:solidFill>
-                      <a:srgbClr val="E35205"/>
-                    </a:solidFill>
-                  </a:tcPr>
-                </a:tc>
-                <a:tc>
-                  <a:txBody>
-                    <a:bodyPr/>
-                    <a:lstStyle/>
-                    <a:p>
-                      <a:pPr algn="l" indent="0" marL="0">
-                        <a:buNone/>
-                      </a:pPr>
-                      <a:r>
-                        <a:rPr lang="en-US" sz="1250" b="1" dirty="0">
-                          <a:solidFill>
-                            <a:srgbClr val="0E1726"/>
-                          </a:solidFill>
-                        </a:rPr>
-                        <a:t>OWASP/CWE</a:t>
-                      </a:r>
-                      <a:endParaRPr lang="en-US" sz="1250" dirty="0"/>
-                    </a:p>
-                  </a:txBody>
-                  <a:tcPr marL="76200" marR="76200" marT="38100" marB="38100" anchor="ctr">
-                    <a:lnL w="12700" cap="flat" cmpd="sng" algn="ctr">
-                      <a:solidFill>
-                        <a:srgbClr val="FFFFFF"/>
-                      </a:solidFill>
-                      <a:prstDash val="solid"/>
-                      <a:round/>
-                      <a:headEnd type="none" w="med" len="med"/>
-                      <a:tailEnd type="none" w="med" len="med"/>
-                    </a:lnL>
-                    <a:lnR w="12700" cap="flat" cmpd="sng" algn="ctr">
-                      <a:solidFill>
-                        <a:srgbClr val="FFFFFF"/>
-                      </a:solidFill>
-                      <a:prstDash val="solid"/>
-                      <a:round/>
-                      <a:headEnd type="none" w="med" len="med"/>
-                      <a:tailEnd type="none" w="med" len="med"/>
-                    </a:lnR>
-                    <a:lnT w="12700" cap="flat" cmpd="sng" algn="ctr">
-                      <a:solidFill>
-                        <a:srgbClr val="FFFFFF"/>
-                      </a:solidFill>
-                      <a:prstDash val="solid"/>
-                      <a:round/>
-                      <a:headEnd type="none" w="med" len="med"/>
-                      <a:tailEnd type="none" w="med" len="med"/>
-                    </a:lnT>
-                    <a:lnB w="12700" cap="flat" cmpd="sng" algn="ctr">
-                      <a:solidFill>
-                        <a:srgbClr val="FFFFFF"/>
-                      </a:solidFill>
-                      <a:prstDash val="solid"/>
-                      <a:round/>
-                      <a:headEnd type="none" w="med" len="med"/>
-                      <a:tailEnd type="none" w="med" len="med"/>
-                    </a:lnB>
-                    <a:solidFill>
-                      <a:srgbClr val="E35205"/>
-                    </a:solidFill>
-                  </a:tcPr>
-                </a:tc>
-                <a:tc>
-                  <a:txBody>
-                    <a:bodyPr/>
-                    <a:lstStyle/>
-                    <a:p>
-                      <a:pPr algn="l" indent="0" marL="0">
-                        <a:buNone/>
-                      </a:pPr>
-                      <a:r>
-                        <a:rPr lang="en-US" sz="1250" b="1" dirty="0">
-                          <a:solidFill>
-                            <a:srgbClr val="0E1726"/>
-                          </a:solidFill>
-                        </a:rPr>
-                        <a:t>One-line</a:t>
-                      </a:r>
-                      <a:endParaRPr lang="en-US" sz="1250" dirty="0"/>
-                    </a:p>
-                  </a:txBody>
-                  <a:tcPr marL="76200" marR="76200" marT="38100" marB="38100" anchor="ctr">
-                    <a:lnL w="12700" cap="flat" cmpd="sng" algn="ctr">
-                      <a:solidFill>
-                        <a:srgbClr val="FFFFFF"/>
-                      </a:solidFill>
-                      <a:prstDash val="solid"/>
-                      <a:round/>
-                      <a:headEnd type="none" w="med" len="med"/>
-                      <a:tailEnd type="none" w="med" len="med"/>
-                    </a:lnL>
-                    <a:lnR w="12700" cap="flat" cmpd="sng" algn="ctr">
-                      <a:solidFill>
-                        <a:srgbClr val="FFFFFF"/>
-                      </a:solidFill>
-                      <a:prstDash val="solid"/>
-                      <a:round/>
-                      <a:headEnd type="none" w="med" len="med"/>
-                      <a:tailEnd type="none" w="med" len="med"/>
-                    </a:lnR>
-                    <a:lnT w="12700" cap="flat" cmpd="sng" algn="ctr">
-                      <a:solidFill>
-                        <a:srgbClr val="FFFFFF"/>
-                      </a:solidFill>
-                      <a:prstDash val="solid"/>
-                      <a:round/>
-                      <a:headEnd type="none" w="med" len="med"/>
-                      <a:tailEnd type="none" w="med" len="med"/>
-                    </a:lnT>
-                    <a:lnB w="12700" cap="flat" cmpd="sng" algn="ctr">
-                      <a:solidFill>
-                        <a:srgbClr val="FFFFFF"/>
-                      </a:solidFill>
-                      <a:prstDash val="solid"/>
-                      <a:round/>
-                      <a:headEnd type="none" w="med" len="med"/>
-                      <a:tailEnd type="none" w="med" len="med"/>
-                    </a:lnB>
-                    <a:solidFill>
-                      <a:srgbClr val="E35205"/>
-                    </a:solidFill>
-                  </a:tcPr>
-                </a:tc>
-              </a:tr>
-              <a:tr h="420624">
-                <a:tc>
-                  <a:txBody>
-                    <a:bodyPr/>
-                    <a:lstStyle/>
-                    <a:p>
-                      <a:pPr algn="l" indent="0" marL="0">
-                        <a:buNone/>
-                      </a:pPr>
-                      <a:r>
-                        <a:rPr lang="en-US" sz="1200" dirty="0">
-                          <a:solidFill>
-                            <a:srgbClr val="1F2937"/>
-                          </a:solidFill>
-                        </a:rPr>
-                        <a:t>1</a:t>
-                      </a:r>
-                      <a:endParaRPr lang="en-US" sz="1200" dirty="0"/>
-                    </a:p>
-                  </a:txBody>
-                  <a:tcPr marL="76200" marR="76200" marT="38100" marB="38100" anchor="ctr">
-                    <a:lnL w="12700" cap="flat" cmpd="sng" algn="ctr">
-                      <a:solidFill>
-                        <a:srgbClr val="FFFFFF"/>
-                      </a:solidFill>
-                      <a:prstDash val="solid"/>
-                      <a:round/>
-                      <a:headEnd type="none" w="med" len="med"/>
-                      <a:tailEnd type="none" w="med" len="med"/>
-                    </a:lnL>
-                    <a:lnR w="12700" cap="flat" cmpd="sng" algn="ctr">
-                      <a:solidFill>
-                        <a:srgbClr val="FFFFFF"/>
-                      </a:solidFill>
-                      <a:prstDash val="solid"/>
-                      <a:round/>
-                      <a:headEnd type="none" w="med" len="med"/>
-                      <a:tailEnd type="none" w="med" len="med"/>
-                    </a:lnR>
-                    <a:lnT w="12700" cap="flat" cmpd="sng" algn="ctr">
-                      <a:solidFill>
-                        <a:srgbClr val="FFFFFF"/>
-                      </a:solidFill>
-                      <a:prstDash val="solid"/>
-                      <a:round/>
-                      <a:headEnd type="none" w="med" len="med"/>
-                      <a:tailEnd type="none" w="med" len="med"/>
-                    </a:lnT>
-                    <a:lnB w="12700" cap="flat" cmpd="sng" algn="ctr">
-                      <a:solidFill>
-                        <a:srgbClr val="FFFFFF"/>
-                      </a:solidFill>
-                      <a:prstDash val="solid"/>
-                      <a:round/>
-                      <a:headEnd type="none" w="med" len="med"/>
-                      <a:tailEnd type="none" w="med" len="med"/>
-                    </a:lnB>
-                    <a:solidFill>
-                      <a:srgbClr val="F1F5F9"/>
-                    </a:solidFill>
-                  </a:tcPr>
-                </a:tc>
-                <a:tc>
-                  <a:txBody>
-                    <a:bodyPr/>
-                    <a:lstStyle/>
-                    <a:p>
-                      <a:pPr algn="l" indent="0" marL="0">
-                        <a:buNone/>
-                      </a:pPr>
-                      <a:r>
-                        <a:rPr lang="en-US" sz="1200" dirty="0">
-                          <a:solidFill>
-                            <a:srgbClr val="1F2937"/>
-                          </a:solidFill>
-                        </a:rPr>
-                        <a:t>Threat modeling</a:t>
-                      </a:r>
-                      <a:endParaRPr lang="en-US" sz="1200" dirty="0"/>
-                    </a:p>
-                  </a:txBody>
-                  <a:tcPr marL="76200" marR="76200" marT="38100" marB="38100" anchor="ctr">
-                    <a:lnL w="12700" cap="flat" cmpd="sng" algn="ctr">
-                      <a:solidFill>
-                        <a:srgbClr val="FFFFFF"/>
-                      </a:solidFill>
-                      <a:prstDash val="solid"/>
-                      <a:round/>
-                      <a:headEnd type="none" w="med" len="med"/>
-                      <a:tailEnd type="none" w="med" len="med"/>
-                    </a:lnL>
-                    <a:lnR w="12700" cap="flat" cmpd="sng" algn="ctr">
-                      <a:solidFill>
-                        <a:srgbClr val="FFFFFF"/>
-                      </a:solidFill>
-                      <a:prstDash val="solid"/>
-                      <a:round/>
-                      <a:headEnd type="none" w="med" len="med"/>
-                      <a:tailEnd type="none" w="med" len="med"/>
-                    </a:lnR>
-                    <a:lnT w="12700" cap="flat" cmpd="sng" algn="ctr">
-                      <a:solidFill>
-                        <a:srgbClr val="FFFFFF"/>
-                      </a:solidFill>
-                      <a:prstDash val="solid"/>
-                      <a:round/>
-                      <a:headEnd type="none" w="med" len="med"/>
-                      <a:tailEnd type="none" w="med" len="med"/>
-                    </a:lnT>
-                    <a:lnB w="12700" cap="flat" cmpd="sng" algn="ctr">
-                      <a:solidFill>
-                        <a:srgbClr val="FFFFFF"/>
-                      </a:solidFill>
-                      <a:prstDash val="solid"/>
-                      <a:round/>
-                      <a:headEnd type="none" w="med" len="med"/>
-                      <a:tailEnd type="none" w="med" len="med"/>
-                    </a:lnB>
-                    <a:solidFill>
-                      <a:srgbClr val="F1F5F9"/>
-                    </a:solidFill>
-                  </a:tcPr>
-                </a:tc>
-                <a:tc>
-                  <a:txBody>
-                    <a:bodyPr/>
-                    <a:lstStyle/>
-                    <a:p>
-                      <a:pPr algn="l" indent="0" marL="0">
-                        <a:buNone/>
-                      </a:pPr>
-                      <a:r>
-                        <a:rPr lang="en-US" sz="1200" dirty="0">
-                          <a:solidFill>
-                            <a:srgbClr val="1F2937"/>
-                          </a:solidFill>
-                        </a:rPr>
-                        <a:t>A06, CWE-501</a:t>
-                      </a:r>
-                      <a:endParaRPr lang="en-US" sz="1200" dirty="0"/>
-                    </a:p>
-                  </a:txBody>
-                  <a:tcPr marL="76200" marR="76200" marT="38100" marB="38100" anchor="ctr">
-                    <a:lnL w="12700" cap="flat" cmpd="sng" algn="ctr">
-                      <a:solidFill>
-                        <a:srgbClr val="FFFFFF"/>
-                      </a:solidFill>
-                      <a:prstDash val="solid"/>
-                      <a:round/>
-                      <a:headEnd type="none" w="med" len="med"/>
-                      <a:tailEnd type="none" w="med" len="med"/>
-                    </a:lnL>
-                    <a:lnR w="12700" cap="flat" cmpd="sng" algn="ctr">
-                      <a:solidFill>
-                        <a:srgbClr val="FFFFFF"/>
-                      </a:solidFill>
-                      <a:prstDash val="solid"/>
-                      <a:round/>
-                      <a:headEnd type="none" w="med" len="med"/>
-                      <a:tailEnd type="none" w="med" len="med"/>
-                    </a:lnR>
-                    <a:lnT w="12700" cap="flat" cmpd="sng" algn="ctr">
-                      <a:solidFill>
-                        <a:srgbClr val="FFFFFF"/>
-                      </a:solidFill>
-                      <a:prstDash val="solid"/>
-                      <a:round/>
-                      <a:headEnd type="none" w="med" len="med"/>
-                      <a:tailEnd type="none" w="med" len="med"/>
-                    </a:lnT>
-                    <a:lnB w="12700" cap="flat" cmpd="sng" algn="ctr">
-                      <a:solidFill>
-                        <a:srgbClr val="FFFFFF"/>
-                      </a:solidFill>
-                      <a:prstDash val="solid"/>
-                      <a:round/>
-                      <a:headEnd type="none" w="med" len="med"/>
-                      <a:tailEnd type="none" w="med" len="med"/>
-                    </a:lnB>
-                    <a:solidFill>
-                      <a:srgbClr val="F1F5F9"/>
-                    </a:solidFill>
-                  </a:tcPr>
-                </a:tc>
-                <a:tc>
-                  <a:txBody>
-                    <a:bodyPr/>
-                    <a:lstStyle/>
-                    <a:p>
-                      <a:pPr algn="l" indent="0" marL="0">
-                        <a:buNone/>
-                      </a:pPr>
-                      <a:r>
-                        <a:rPr lang="en-US" sz="1200" dirty="0">
-                          <a:solidFill>
-                            <a:srgbClr val="1F2937"/>
-                          </a:solidFill>
-                        </a:rPr>
-                        <a:t>think like an attacker; STRIDE</a:t>
-                      </a:r>
-                      <a:endParaRPr lang="en-US" sz="1200" dirty="0"/>
-                    </a:p>
-                  </a:txBody>
-                  <a:tcPr marL="76200" marR="76200" marT="38100" marB="38100" anchor="ctr">
-                    <a:lnL w="12700" cap="flat" cmpd="sng" algn="ctr">
-                      <a:solidFill>
-                        <a:srgbClr val="FFFFFF"/>
-                      </a:solidFill>
-                      <a:prstDash val="solid"/>
-                      <a:round/>
-                      <a:headEnd type="none" w="med" len="med"/>
-                      <a:tailEnd type="none" w="med" len="med"/>
-                    </a:lnL>
-                    <a:lnR w="12700" cap="flat" cmpd="sng" algn="ctr">
-                      <a:solidFill>
-                        <a:srgbClr val="FFFFFF"/>
-                      </a:solidFill>
-                      <a:prstDash val="solid"/>
-                      <a:round/>
-                      <a:headEnd type="none" w="med" len="med"/>
-                      <a:tailEnd type="none" w="med" len="med"/>
-                    </a:lnR>
-                    <a:lnT w="12700" cap="flat" cmpd="sng" algn="ctr">
-                      <a:solidFill>
-                        <a:srgbClr val="FFFFFF"/>
-                      </a:solidFill>
-                      <a:prstDash val="solid"/>
-                      <a:round/>
-                      <a:headEnd type="none" w="med" len="med"/>
-                      <a:tailEnd type="none" w="med" len="med"/>
-                    </a:lnT>
-                    <a:lnB w="12700" cap="flat" cmpd="sng" algn="ctr">
-                      <a:solidFill>
-                        <a:srgbClr val="FFFFFF"/>
-                      </a:solidFill>
-                      <a:prstDash val="solid"/>
-                      <a:round/>
-                      <a:headEnd type="none" w="med" len="med"/>
-                      <a:tailEnd type="none" w="med" len="med"/>
-                    </a:lnB>
-                    <a:solidFill>
-                      <a:srgbClr val="F1F5F9"/>
-                    </a:solidFill>
-                  </a:tcPr>
-                </a:tc>
-              </a:tr>
-              <a:tr h="420624">
-                <a:tc>
-                  <a:txBody>
-                    <a:bodyPr/>
-                    <a:lstStyle/>
-                    <a:p>
-                      <a:pPr algn="l" indent="0" marL="0">
-                        <a:buNone/>
-                      </a:pPr>
-                      <a:r>
-                        <a:rPr lang="en-US" sz="1200" dirty="0">
-                          <a:solidFill>
-                            <a:srgbClr val="1F2937"/>
-                          </a:solidFill>
-                        </a:rPr>
-                        <a:t>2</a:t>
-                      </a:r>
-                      <a:endParaRPr lang="en-US" sz="1200" dirty="0"/>
-                    </a:p>
-                  </a:txBody>
-                  <a:tcPr marL="76200" marR="76200" marT="38100" marB="38100" anchor="ctr">
-                    <a:lnL w="12700" cap="flat" cmpd="sng" algn="ctr">
-                      <a:solidFill>
-                        <a:srgbClr val="FFFFFF"/>
-                      </a:solidFill>
-                      <a:prstDash val="solid"/>
-                      <a:round/>
-                      <a:headEnd type="none" w="med" len="med"/>
-                      <a:tailEnd type="none" w="med" len="med"/>
-                    </a:lnL>
-                    <a:lnR w="12700" cap="flat" cmpd="sng" algn="ctr">
-                      <a:solidFill>
-                        <a:srgbClr val="FFFFFF"/>
-                      </a:solidFill>
-                      <a:prstDash val="solid"/>
-                      <a:round/>
-                      <a:headEnd type="none" w="med" len="med"/>
-                      <a:tailEnd type="none" w="med" len="med"/>
-                    </a:lnR>
-                    <a:lnT w="12700" cap="flat" cmpd="sng" algn="ctr">
-                      <a:solidFill>
-                        <a:srgbClr val="FFFFFF"/>
-                      </a:solidFill>
-                      <a:prstDash val="solid"/>
-                      <a:round/>
-                      <a:headEnd type="none" w="med" len="med"/>
-                      <a:tailEnd type="none" w="med" len="med"/>
-                    </a:lnT>
-                    <a:lnB w="12700" cap="flat" cmpd="sng" algn="ctr">
-                      <a:solidFill>
-                        <a:srgbClr val="FFFFFF"/>
-                      </a:solidFill>
-                      <a:prstDash val="solid"/>
-                      <a:round/>
-                      <a:headEnd type="none" w="med" len="med"/>
-                      <a:tailEnd type="none" w="med" len="med"/>
-                    </a:lnB>
-                    <a:solidFill>
-                      <a:srgbClr val="E8EDF3"/>
-                    </a:solidFill>
-                  </a:tcPr>
-                </a:tc>
-                <a:tc>
-                  <a:txBody>
-                    <a:bodyPr/>
-                    <a:lstStyle/>
-                    <a:p>
-                      <a:pPr algn="l" indent="0" marL="0">
-                        <a:buNone/>
-                      </a:pPr>
-                      <a:r>
-                        <a:rPr lang="en-US" sz="1200" dirty="0">
-                          <a:solidFill>
-                            <a:srgbClr val="1F2937"/>
-                          </a:solidFill>
-                        </a:rPr>
-                        <a:t>SDLC &amp; tooling</a:t>
-                      </a:r>
-                      <a:endParaRPr lang="en-US" sz="1200" dirty="0"/>
-                    </a:p>
-                  </a:txBody>
-                  <a:tcPr marL="76200" marR="76200" marT="38100" marB="38100" anchor="ctr">
-                    <a:lnL w="12700" cap="flat" cmpd="sng" algn="ctr">
-                      <a:solidFill>
-                        <a:srgbClr val="FFFFFF"/>
-                      </a:solidFill>
-                      <a:prstDash val="solid"/>
-                      <a:round/>
-                      <a:headEnd type="none" w="med" len="med"/>
-                      <a:tailEnd type="none" w="med" len="med"/>
-                    </a:lnL>
-                    <a:lnR w="12700" cap="flat" cmpd="sng" algn="ctr">
-                      <a:solidFill>
-                        <a:srgbClr val="FFFFFF"/>
-                      </a:solidFill>
-                      <a:prstDash val="solid"/>
-                      <a:round/>
-                      <a:headEnd type="none" w="med" len="med"/>
-                      <a:tailEnd type="none" w="med" len="med"/>
-                    </a:lnR>
-                    <a:lnT w="12700" cap="flat" cmpd="sng" algn="ctr">
-                      <a:solidFill>
-                        <a:srgbClr val="FFFFFF"/>
-                      </a:solidFill>
-                      <a:prstDash val="solid"/>
-                      <a:round/>
-                      <a:headEnd type="none" w="med" len="med"/>
-                      <a:tailEnd type="none" w="med" len="med"/>
-                    </a:lnT>
-                    <a:lnB w="12700" cap="flat" cmpd="sng" algn="ctr">
-                      <a:solidFill>
-                        <a:srgbClr val="FFFFFF"/>
-                      </a:solidFill>
-                      <a:prstDash val="solid"/>
-                      <a:round/>
-                      <a:headEnd type="none" w="med" len="med"/>
-                      <a:tailEnd type="none" w="med" len="med"/>
-                    </a:lnB>
-                    <a:solidFill>
-                      <a:srgbClr val="E8EDF3"/>
-                    </a:solidFill>
-                  </a:tcPr>
-                </a:tc>
-                <a:tc>
-                  <a:txBody>
-                    <a:bodyPr/>
-                    <a:lstStyle/>
-                    <a:p>
-                      <a:pPr algn="l" indent="0" marL="0">
-                        <a:buNone/>
-                      </a:pPr>
-                      <a:r>
-                        <a:rPr lang="en-US" sz="1200" dirty="0">
-                          <a:solidFill>
-                            <a:srgbClr val="1F2937"/>
-                          </a:solidFill>
-                        </a:rPr>
-                        <a:t>A02/04/05, CWE-89/78/327/798</a:t>
-                      </a:r>
-                      <a:endParaRPr lang="en-US" sz="1200" dirty="0"/>
-                    </a:p>
-                  </a:txBody>
-                  <a:tcPr marL="76200" marR="76200" marT="38100" marB="38100" anchor="ctr">
-                    <a:lnL w="12700" cap="flat" cmpd="sng" algn="ctr">
-                      <a:solidFill>
-                        <a:srgbClr val="FFFFFF"/>
-                      </a:solidFill>
-                      <a:prstDash val="solid"/>
-                      <a:round/>
-                      <a:headEnd type="none" w="med" len="med"/>
-                      <a:tailEnd type="none" w="med" len="med"/>
-                    </a:lnL>
-                    <a:lnR w="12700" cap="flat" cmpd="sng" algn="ctr">
-                      <a:solidFill>
-                        <a:srgbClr val="FFFFFF"/>
-                      </a:solidFill>
-                      <a:prstDash val="solid"/>
-                      <a:round/>
-                      <a:headEnd type="none" w="med" len="med"/>
-                      <a:tailEnd type="none" w="med" len="med"/>
-                    </a:lnR>
-                    <a:lnT w="12700" cap="flat" cmpd="sng" algn="ctr">
-                      <a:solidFill>
-                        <a:srgbClr val="FFFFFF"/>
-                      </a:solidFill>
-                      <a:prstDash val="solid"/>
-                      <a:round/>
-                      <a:headEnd type="none" w="med" len="med"/>
-                      <a:tailEnd type="none" w="med" len="med"/>
-                    </a:lnT>
-                    <a:lnB w="12700" cap="flat" cmpd="sng" algn="ctr">
-                      <a:solidFill>
-                        <a:srgbClr val="FFFFFF"/>
-                      </a:solidFill>
-                      <a:prstDash val="solid"/>
-                      <a:round/>
-                      <a:headEnd type="none" w="med" len="med"/>
-                      <a:tailEnd type="none" w="med" len="med"/>
-                    </a:lnB>
-                    <a:solidFill>
-                      <a:srgbClr val="E8EDF3"/>
-                    </a:solidFill>
-                  </a:tcPr>
-                </a:tc>
-                <a:tc>
-                  <a:txBody>
-                    <a:bodyPr/>
-                    <a:lstStyle/>
-                    <a:p>
-                      <a:pPr algn="l" indent="0" marL="0">
-                        <a:buNone/>
-                      </a:pPr>
-                      <a:r>
-                        <a:rPr lang="en-US" sz="1200" dirty="0">
-                          <a:solidFill>
-                            <a:srgbClr val="1F2937"/>
-                          </a:solidFill>
-                        </a:rPr>
-                        <a:t>SAST/DAST/SCA/fuzzing; shift left</a:t>
-                      </a:r>
-                      <a:endParaRPr lang="en-US" sz="1200" dirty="0"/>
-                    </a:p>
-                  </a:txBody>
-                  <a:tcPr marL="76200" marR="76200" marT="38100" marB="38100" anchor="ctr">
-                    <a:lnL w="12700" cap="flat" cmpd="sng" algn="ctr">
-                      <a:solidFill>
-                        <a:srgbClr val="FFFFFF"/>
-                      </a:solidFill>
-                      <a:prstDash val="solid"/>
-                      <a:round/>
-                      <a:headEnd type="none" w="med" len="med"/>
-                      <a:tailEnd type="none" w="med" len="med"/>
-                    </a:lnL>
-                    <a:lnR w="12700" cap="flat" cmpd="sng" algn="ctr">
-                      <a:solidFill>
-                        <a:srgbClr val="FFFFFF"/>
-                      </a:solidFill>
-                      <a:prstDash val="solid"/>
-                      <a:round/>
-                      <a:headEnd type="none" w="med" len="med"/>
-                      <a:tailEnd type="none" w="med" len="med"/>
-                    </a:lnR>
-                    <a:lnT w="12700" cap="flat" cmpd="sng" algn="ctr">
-                      <a:solidFill>
-                        <a:srgbClr val="FFFFFF"/>
-                      </a:solidFill>
-                      <a:prstDash val="solid"/>
-                      <a:round/>
-                      <a:headEnd type="none" w="med" len="med"/>
-                      <a:tailEnd type="none" w="med" len="med"/>
-                    </a:lnT>
-                    <a:lnB w="12700" cap="flat" cmpd="sng" algn="ctr">
-                      <a:solidFill>
-                        <a:srgbClr val="FFFFFF"/>
-                      </a:solidFill>
-                      <a:prstDash val="solid"/>
-                      <a:round/>
-                      <a:headEnd type="none" w="med" len="med"/>
-                      <a:tailEnd type="none" w="med" len="med"/>
-                    </a:lnB>
-                    <a:solidFill>
-                      <a:srgbClr val="E8EDF3"/>
-                    </a:solidFill>
-                  </a:tcPr>
-                </a:tc>
-              </a:tr>
-              <a:tr h="420624">
-                <a:tc>
-                  <a:txBody>
-                    <a:bodyPr/>
-                    <a:lstStyle/>
-                    <a:p>
-                      <a:pPr algn="l" indent="0" marL="0">
-                        <a:buNone/>
-                      </a:pPr>
-                      <a:r>
-                        <a:rPr lang="en-US" sz="1200" dirty="0">
-                          <a:solidFill>
-                            <a:srgbClr val="1F2937"/>
-                          </a:solidFill>
-                        </a:rPr>
-                        <a:t>3</a:t>
-                      </a:r>
-                      <a:endParaRPr lang="en-US" sz="1200" dirty="0"/>
-                    </a:p>
-                  </a:txBody>
-                  <a:tcPr marL="76200" marR="76200" marT="38100" marB="38100" anchor="ctr">
-                    <a:lnL w="12700" cap="flat" cmpd="sng" algn="ctr">
-                      <a:solidFill>
-                        <a:srgbClr val="FFFFFF"/>
-                      </a:solidFill>
-                      <a:prstDash val="solid"/>
-                      <a:round/>
-                      <a:headEnd type="none" w="med" len="med"/>
-                      <a:tailEnd type="none" w="med" len="med"/>
-                    </a:lnL>
-                    <a:lnR w="12700" cap="flat" cmpd="sng" algn="ctr">
-                      <a:solidFill>
-                        <a:srgbClr val="FFFFFF"/>
-                      </a:solidFill>
-                      <a:prstDash val="solid"/>
-                      <a:round/>
-                      <a:headEnd type="none" w="med" len="med"/>
-                      <a:tailEnd type="none" w="med" len="med"/>
-                    </a:lnR>
-                    <a:lnT w="12700" cap="flat" cmpd="sng" algn="ctr">
-                      <a:solidFill>
-                        <a:srgbClr val="FFFFFF"/>
-                      </a:solidFill>
-                      <a:prstDash val="solid"/>
-                      <a:round/>
-                      <a:headEnd type="none" w="med" len="med"/>
-                      <a:tailEnd type="none" w="med" len="med"/>
-                    </a:lnT>
-                    <a:lnB w="12700" cap="flat" cmpd="sng" algn="ctr">
-                      <a:solidFill>
-                        <a:srgbClr val="FFFFFF"/>
-                      </a:solidFill>
-                      <a:prstDash val="solid"/>
-                      <a:round/>
-                      <a:headEnd type="none" w="med" len="med"/>
-                      <a:tailEnd type="none" w="med" len="med"/>
-                    </a:lnB>
-                    <a:solidFill>
-                      <a:srgbClr val="F1F5F9"/>
-                    </a:solidFill>
-                  </a:tcPr>
-                </a:tc>
-                <a:tc>
-                  <a:txBody>
-                    <a:bodyPr/>
-                    <a:lstStyle/>
-                    <a:p>
-                      <a:pPr algn="l" indent="0" marL="0">
-                        <a:buNone/>
-                      </a:pPr>
-                      <a:r>
-                        <a:rPr lang="en-US" sz="1200" dirty="0">
-                          <a:solidFill>
-                            <a:srgbClr val="1F2937"/>
-                          </a:solidFill>
-                        </a:rPr>
-                        <a:t>Crypto</a:t>
-                      </a:r>
-                      <a:endParaRPr lang="en-US" sz="1200" dirty="0"/>
-                    </a:p>
-                  </a:txBody>
-                  <a:tcPr marL="76200" marR="76200" marT="38100" marB="38100" anchor="ctr">
-                    <a:lnL w="12700" cap="flat" cmpd="sng" algn="ctr">
-                      <a:solidFill>
-                        <a:srgbClr val="FFFFFF"/>
-                      </a:solidFill>
-                      <a:prstDash val="solid"/>
-                      <a:round/>
-                      <a:headEnd type="none" w="med" len="med"/>
-                      <a:tailEnd type="none" w="med" len="med"/>
-                    </a:lnL>
-                    <a:lnR w="12700" cap="flat" cmpd="sng" algn="ctr">
-                      <a:solidFill>
-                        <a:srgbClr val="FFFFFF"/>
-                      </a:solidFill>
-                      <a:prstDash val="solid"/>
-                      <a:round/>
-                      <a:headEnd type="none" w="med" len="med"/>
-                      <a:tailEnd type="none" w="med" len="med"/>
-                    </a:lnR>
-                    <a:lnT w="12700" cap="flat" cmpd="sng" algn="ctr">
-                      <a:solidFill>
-                        <a:srgbClr val="FFFFFF"/>
-                      </a:solidFill>
-                      <a:prstDash val="solid"/>
-                      <a:round/>
-                      <a:headEnd type="none" w="med" len="med"/>
-                      <a:tailEnd type="none" w="med" len="med"/>
-                    </a:lnT>
-                    <a:lnB w="12700" cap="flat" cmpd="sng" algn="ctr">
-                      <a:solidFill>
-                        <a:srgbClr val="FFFFFF"/>
-                      </a:solidFill>
-                      <a:prstDash val="solid"/>
-                      <a:round/>
-                      <a:headEnd type="none" w="med" len="med"/>
-                      <a:tailEnd type="none" w="med" len="med"/>
-                    </a:lnB>
-                    <a:solidFill>
-                      <a:srgbClr val="F1F5F9"/>
-                    </a:solidFill>
-                  </a:tcPr>
-                </a:tc>
-                <a:tc>
-                  <a:txBody>
-                    <a:bodyPr/>
-                    <a:lstStyle/>
-                    <a:p>
-                      <a:pPr algn="l" indent="0" marL="0">
-                        <a:buNone/>
-                      </a:pPr>
-                      <a:r>
-                        <a:rPr lang="en-US" sz="1200" dirty="0">
-                          <a:solidFill>
-                            <a:srgbClr val="1F2937"/>
-                          </a:solidFill>
-                        </a:rPr>
-                        <a:t>A04, CWE-327</a:t>
-                      </a:r>
-                      <a:endParaRPr lang="en-US" sz="1200" dirty="0"/>
-                    </a:p>
-                  </a:txBody>
-                  <a:tcPr marL="76200" marR="76200" marT="38100" marB="38100" anchor="ctr">
-                    <a:lnL w="12700" cap="flat" cmpd="sng" algn="ctr">
-                      <a:solidFill>
-                        <a:srgbClr val="FFFFFF"/>
-                      </a:solidFill>
-                      <a:prstDash val="solid"/>
-                      <a:round/>
-                      <a:headEnd type="none" w="med" len="med"/>
-                      <a:tailEnd type="none" w="med" len="med"/>
-                    </a:lnL>
-                    <a:lnR w="12700" cap="flat" cmpd="sng" algn="ctr">
-                      <a:solidFill>
-                        <a:srgbClr val="FFFFFF"/>
-                      </a:solidFill>
-                      <a:prstDash val="solid"/>
-                      <a:round/>
-                      <a:headEnd type="none" w="med" len="med"/>
-                      <a:tailEnd type="none" w="med" len="med"/>
-                    </a:lnR>
-                    <a:lnT w="12700" cap="flat" cmpd="sng" algn="ctr">
-                      <a:solidFill>
-                        <a:srgbClr val="FFFFFF"/>
-                      </a:solidFill>
-                      <a:prstDash val="solid"/>
-                      <a:round/>
-                      <a:headEnd type="none" w="med" len="med"/>
-                      <a:tailEnd type="none" w="med" len="med"/>
-                    </a:lnT>
-                    <a:lnB w="12700" cap="flat" cmpd="sng" algn="ctr">
-                      <a:solidFill>
-                        <a:srgbClr val="FFFFFF"/>
-                      </a:solidFill>
-                      <a:prstDash val="solid"/>
-                      <a:round/>
-                      <a:headEnd type="none" w="med" len="med"/>
-                      <a:tailEnd type="none" w="med" len="med"/>
-                    </a:lnB>
-                    <a:solidFill>
-                      <a:srgbClr val="F1F5F9"/>
-                    </a:solidFill>
-                  </a:tcPr>
-                </a:tc>
-                <a:tc>
-                  <a:txBody>
-                    <a:bodyPr/>
-                    <a:lstStyle/>
-                    <a:p>
-                      <a:pPr algn="l" indent="0" marL="0">
-                        <a:buNone/>
-                      </a:pPr>
-                      <a:r>
-                        <a:rPr lang="en-US" sz="1200" dirty="0">
-                          <a:solidFill>
-                            <a:srgbClr val="1F2937"/>
-                          </a:solidFill>
-                        </a:rPr>
-                        <a:t>KDFs, AEAD; avoid ECB/MD5</a:t>
-                      </a:r>
-                      <a:endParaRPr lang="en-US" sz="1200" dirty="0"/>
-                    </a:p>
-                  </a:txBody>
-                  <a:tcPr marL="76200" marR="76200" marT="38100" marB="38100" anchor="ctr">
-                    <a:lnL w="12700" cap="flat" cmpd="sng" algn="ctr">
-                      <a:solidFill>
-                        <a:srgbClr val="FFFFFF"/>
-                      </a:solidFill>
-                      <a:prstDash val="solid"/>
-                      <a:round/>
-                      <a:headEnd type="none" w="med" len="med"/>
-                      <a:tailEnd type="none" w="med" len="med"/>
-                    </a:lnL>
-                    <a:lnR w="12700" cap="flat" cmpd="sng" algn="ctr">
-                      <a:solidFill>
-                        <a:srgbClr val="FFFFFF"/>
-                      </a:solidFill>
-                      <a:prstDash val="solid"/>
-                      <a:round/>
-                      <a:headEnd type="none" w="med" len="med"/>
-                      <a:tailEnd type="none" w="med" len="med"/>
-                    </a:lnR>
-                    <a:lnT w="12700" cap="flat" cmpd="sng" algn="ctr">
-                      <a:solidFill>
-                        <a:srgbClr val="FFFFFF"/>
-                      </a:solidFill>
-                      <a:prstDash val="solid"/>
-                      <a:round/>
-                      <a:headEnd type="none" w="med" len="med"/>
-                      <a:tailEnd type="none" w="med" len="med"/>
-                    </a:lnT>
-                    <a:lnB w="12700" cap="flat" cmpd="sng" algn="ctr">
-                      <a:solidFill>
-                        <a:srgbClr val="FFFFFF"/>
-                      </a:solidFill>
-                      <a:prstDash val="solid"/>
-                      <a:round/>
-                      <a:headEnd type="none" w="med" len="med"/>
-                      <a:tailEnd type="none" w="med" len="med"/>
-                    </a:lnB>
-                    <a:solidFill>
-                      <a:srgbClr val="F1F5F9"/>
-                    </a:solidFill>
-                  </a:tcPr>
-                </a:tc>
-              </a:tr>
-              <a:tr h="420624">
-                <a:tc>
-                  <a:txBody>
-                    <a:bodyPr/>
-                    <a:lstStyle/>
-                    <a:p>
-                      <a:pPr algn="l" indent="0" marL="0">
-                        <a:buNone/>
-                      </a:pPr>
-                      <a:r>
-                        <a:rPr lang="en-US" sz="1200" dirty="0">
-                          <a:solidFill>
-                            <a:srgbClr val="1F2937"/>
-                          </a:solidFill>
-                        </a:rPr>
-                        <a:t>4</a:t>
-                      </a:r>
-                      <a:endParaRPr lang="en-US" sz="1200" dirty="0"/>
-                    </a:p>
-                  </a:txBody>
-                  <a:tcPr marL="76200" marR="76200" marT="38100" marB="38100" anchor="ctr">
-                    <a:lnL w="12700" cap="flat" cmpd="sng" algn="ctr">
-                      <a:solidFill>
-                        <a:srgbClr val="FFFFFF"/>
-                      </a:solidFill>
-                      <a:prstDash val="solid"/>
-                      <a:round/>
-                      <a:headEnd type="none" w="med" len="med"/>
-                      <a:tailEnd type="none" w="med" len="med"/>
-                    </a:lnL>
-                    <a:lnR w="12700" cap="flat" cmpd="sng" algn="ctr">
-                      <a:solidFill>
-                        <a:srgbClr val="FFFFFF"/>
-                      </a:solidFill>
-                      <a:prstDash val="solid"/>
-                      <a:round/>
-                      <a:headEnd type="none" w="med" len="med"/>
-                      <a:tailEnd type="none" w="med" len="med"/>
-                    </a:lnR>
-                    <a:lnT w="12700" cap="flat" cmpd="sng" algn="ctr">
-                      <a:solidFill>
-                        <a:srgbClr val="FFFFFF"/>
-                      </a:solidFill>
-                      <a:prstDash val="solid"/>
-                      <a:round/>
-                      <a:headEnd type="none" w="med" len="med"/>
-                      <a:tailEnd type="none" w="med" len="med"/>
-                    </a:lnT>
-                    <a:lnB w="12700" cap="flat" cmpd="sng" algn="ctr">
-                      <a:solidFill>
-                        <a:srgbClr val="FFFFFF"/>
-                      </a:solidFill>
-                      <a:prstDash val="solid"/>
-                      <a:round/>
-                      <a:headEnd type="none" w="med" len="med"/>
-                      <a:tailEnd type="none" w="med" len="med"/>
-                    </a:lnB>
-                    <a:solidFill>
-                      <a:srgbClr val="E8EDF3"/>
-                    </a:solidFill>
-                  </a:tcPr>
-                </a:tc>
-                <a:tc>
-                  <a:txBody>
-                    <a:bodyPr/>
-                    <a:lstStyle/>
-                    <a:p>
-                      <a:pPr algn="l" indent="0" marL="0">
-                        <a:buNone/>
-                      </a:pPr>
-                      <a:r>
-                        <a:rPr lang="en-US" sz="1200" dirty="0">
-                          <a:solidFill>
-                            <a:srgbClr val="1F2937"/>
-                          </a:solidFill>
-                        </a:rPr>
-                        <a:t>Injection</a:t>
-                      </a:r>
-                      <a:endParaRPr lang="en-US" sz="1200" dirty="0"/>
-                    </a:p>
-                  </a:txBody>
-                  <a:tcPr marL="76200" marR="76200" marT="38100" marB="38100" anchor="ctr">
-                    <a:lnL w="12700" cap="flat" cmpd="sng" algn="ctr">
-                      <a:solidFill>
-                        <a:srgbClr val="FFFFFF"/>
-                      </a:solidFill>
-                      <a:prstDash val="solid"/>
-                      <a:round/>
-                      <a:headEnd type="none" w="med" len="med"/>
-                      <a:tailEnd type="none" w="med" len="med"/>
-                    </a:lnL>
-                    <a:lnR w="12700" cap="flat" cmpd="sng" algn="ctr">
-                      <a:solidFill>
-                        <a:srgbClr val="FFFFFF"/>
-                      </a:solidFill>
-                      <a:prstDash val="solid"/>
-                      <a:round/>
-                      <a:headEnd type="none" w="med" len="med"/>
-                      <a:tailEnd type="none" w="med" len="med"/>
-                    </a:lnR>
-                    <a:lnT w="12700" cap="flat" cmpd="sng" algn="ctr">
-                      <a:solidFill>
-                        <a:srgbClr val="FFFFFF"/>
-                      </a:solidFill>
-                      <a:prstDash val="solid"/>
-                      <a:round/>
-                      <a:headEnd type="none" w="med" len="med"/>
-                      <a:tailEnd type="none" w="med" len="med"/>
-                    </a:lnT>
-                    <a:lnB w="12700" cap="flat" cmpd="sng" algn="ctr">
-                      <a:solidFill>
-                        <a:srgbClr val="FFFFFF"/>
-                      </a:solidFill>
-                      <a:prstDash val="solid"/>
-                      <a:round/>
-                      <a:headEnd type="none" w="med" len="med"/>
-                      <a:tailEnd type="none" w="med" len="med"/>
-                    </a:lnB>
-                    <a:solidFill>
-                      <a:srgbClr val="E8EDF3"/>
-                    </a:solidFill>
-                  </a:tcPr>
-                </a:tc>
-                <a:tc>
-                  <a:txBody>
-                    <a:bodyPr/>
-                    <a:lstStyle/>
-                    <a:p>
-                      <a:pPr algn="l" indent="0" marL="0">
-                        <a:buNone/>
-                      </a:pPr>
-                      <a:r>
-                        <a:rPr lang="en-US" sz="1200" dirty="0">
-                          <a:solidFill>
-                            <a:srgbClr val="1F2937"/>
-                          </a:solidFill>
-                        </a:rPr>
-                        <a:t>A05, CWE-89/78/434</a:t>
-                      </a:r>
-                      <a:endParaRPr lang="en-US" sz="1200" dirty="0"/>
-                    </a:p>
-                  </a:txBody>
-                  <a:tcPr marL="76200" marR="76200" marT="38100" marB="38100" anchor="ctr">
-                    <a:lnL w="12700" cap="flat" cmpd="sng" algn="ctr">
-                      <a:solidFill>
-                        <a:srgbClr val="FFFFFF"/>
-                      </a:solidFill>
-                      <a:prstDash val="solid"/>
-                      <a:round/>
-                      <a:headEnd type="none" w="med" len="med"/>
-                      <a:tailEnd type="none" w="med" len="med"/>
-                    </a:lnL>
-                    <a:lnR w="12700" cap="flat" cmpd="sng" algn="ctr">
-                      <a:solidFill>
-                        <a:srgbClr val="FFFFFF"/>
-                      </a:solidFill>
-                      <a:prstDash val="solid"/>
-                      <a:round/>
-                      <a:headEnd type="none" w="med" len="med"/>
-                      <a:tailEnd type="none" w="med" len="med"/>
-                    </a:lnR>
-                    <a:lnT w="12700" cap="flat" cmpd="sng" algn="ctr">
-                      <a:solidFill>
-                        <a:srgbClr val="FFFFFF"/>
-                      </a:solidFill>
-                      <a:prstDash val="solid"/>
-                      <a:round/>
-                      <a:headEnd type="none" w="med" len="med"/>
-                      <a:tailEnd type="none" w="med" len="med"/>
-                    </a:lnT>
-                    <a:lnB w="12700" cap="flat" cmpd="sng" algn="ctr">
-                      <a:solidFill>
-                        <a:srgbClr val="FFFFFF"/>
-                      </a:solidFill>
-                      <a:prstDash val="solid"/>
-                      <a:round/>
-                      <a:headEnd type="none" w="med" len="med"/>
-                      <a:tailEnd type="none" w="med" len="med"/>
-                    </a:lnB>
-                    <a:solidFill>
-                      <a:srgbClr val="E8EDF3"/>
-                    </a:solidFill>
-                  </a:tcPr>
-                </a:tc>
-                <a:tc>
-                  <a:txBody>
-                    <a:bodyPr/>
-                    <a:lstStyle/>
-                    <a:p>
-                      <a:pPr algn="l" indent="0" marL="0">
-                        <a:buNone/>
-                      </a:pPr>
-                      <a:r>
-                        <a:rPr lang="en-US" sz="1200" dirty="0">
-                          <a:solidFill>
-                            <a:srgbClr val="1F2937"/>
-                          </a:solidFill>
-                        </a:rPr>
-                        <a:t>data ≠ code; parameterize</a:t>
-                      </a:r>
-                      <a:endParaRPr lang="en-US" sz="1200" dirty="0"/>
-                    </a:p>
-                  </a:txBody>
-                  <a:tcPr marL="76200" marR="76200" marT="38100" marB="38100" anchor="ctr">
-                    <a:lnL w="12700" cap="flat" cmpd="sng" algn="ctr">
-                      <a:solidFill>
-                        <a:srgbClr val="FFFFFF"/>
-                      </a:solidFill>
-                      <a:prstDash val="solid"/>
-                      <a:round/>
-                      <a:headEnd type="none" w="med" len="med"/>
-                      <a:tailEnd type="none" w="med" len="med"/>
-                    </a:lnL>
-                    <a:lnR w="12700" cap="flat" cmpd="sng" algn="ctr">
-                      <a:solidFill>
-                        <a:srgbClr val="FFFFFF"/>
-                      </a:solidFill>
-                      <a:prstDash val="solid"/>
-                      <a:round/>
-                      <a:headEnd type="none" w="med" len="med"/>
-                      <a:tailEnd type="none" w="med" len="med"/>
-                    </a:lnR>
-                    <a:lnT w="12700" cap="flat" cmpd="sng" algn="ctr">
-                      <a:solidFill>
-                        <a:srgbClr val="FFFFFF"/>
-                      </a:solidFill>
-                      <a:prstDash val="solid"/>
-                      <a:round/>
-                      <a:headEnd type="none" w="med" len="med"/>
-                      <a:tailEnd type="none" w="med" len="med"/>
-                    </a:lnT>
-                    <a:lnB w="12700" cap="flat" cmpd="sng" algn="ctr">
-                      <a:solidFill>
-                        <a:srgbClr val="FFFFFF"/>
-                      </a:solidFill>
-                      <a:prstDash val="solid"/>
-                      <a:round/>
-                      <a:headEnd type="none" w="med" len="med"/>
-                      <a:tailEnd type="none" w="med" len="med"/>
-                    </a:lnB>
-                    <a:solidFill>
-                      <a:srgbClr val="E8EDF3"/>
-                    </a:solidFill>
-                  </a:tcPr>
-                </a:tc>
-              </a:tr>
-              <a:tr h="420624">
-                <a:tc>
-                  <a:txBody>
-                    <a:bodyPr/>
-                    <a:lstStyle/>
-                    <a:p>
-                      <a:pPr algn="l" indent="0" marL="0">
-                        <a:buNone/>
-                      </a:pPr>
-                      <a:r>
-                        <a:rPr lang="en-US" sz="1200" dirty="0">
-                          <a:solidFill>
-                            <a:srgbClr val="1F2937"/>
-                          </a:solidFill>
-                        </a:rPr>
-                        <a:t>5</a:t>
-                      </a:r>
-                      <a:endParaRPr lang="en-US" sz="1200" dirty="0"/>
-                    </a:p>
-                  </a:txBody>
-                  <a:tcPr marL="76200" marR="76200" marT="38100" marB="38100" anchor="ctr">
-                    <a:lnL w="12700" cap="flat" cmpd="sng" algn="ctr">
-                      <a:solidFill>
-                        <a:srgbClr val="FFFFFF"/>
-                      </a:solidFill>
-                      <a:prstDash val="solid"/>
-                      <a:round/>
-                      <a:headEnd type="none" w="med" len="med"/>
-                      <a:tailEnd type="none" w="med" len="med"/>
-                    </a:lnL>
-                    <a:lnR w="12700" cap="flat" cmpd="sng" algn="ctr">
-                      <a:solidFill>
-                        <a:srgbClr val="FFFFFF"/>
-                      </a:solidFill>
-                      <a:prstDash val="solid"/>
-                      <a:round/>
-                      <a:headEnd type="none" w="med" len="med"/>
-                      <a:tailEnd type="none" w="med" len="med"/>
-                    </a:lnR>
-                    <a:lnT w="12700" cap="flat" cmpd="sng" algn="ctr">
-                      <a:solidFill>
-                        <a:srgbClr val="FFFFFF"/>
-                      </a:solidFill>
-                      <a:prstDash val="solid"/>
-                      <a:round/>
-                      <a:headEnd type="none" w="med" len="med"/>
-                      <a:tailEnd type="none" w="med" len="med"/>
-                    </a:lnT>
-                    <a:lnB w="12700" cap="flat" cmpd="sng" algn="ctr">
-                      <a:solidFill>
-                        <a:srgbClr val="FFFFFF"/>
-                      </a:solidFill>
-                      <a:prstDash val="solid"/>
-                      <a:round/>
-                      <a:headEnd type="none" w="med" len="med"/>
-                      <a:tailEnd type="none" w="med" len="med"/>
-                    </a:lnB>
-                    <a:solidFill>
-                      <a:srgbClr val="F1F5F9"/>
-                    </a:solidFill>
-                  </a:tcPr>
-                </a:tc>
-                <a:tc>
-                  <a:txBody>
-                    <a:bodyPr/>
-                    <a:lstStyle/>
-                    <a:p>
-                      <a:pPr algn="l" indent="0" marL="0">
-                        <a:buNone/>
-                      </a:pPr>
-                      <a:r>
-                        <a:rPr lang="en-US" sz="1200" dirty="0">
-                          <a:solidFill>
-                            <a:srgbClr val="1F2937"/>
-                          </a:solidFill>
-                        </a:rPr>
-                        <a:t>XSS</a:t>
-                      </a:r>
-                      <a:endParaRPr lang="en-US" sz="1200" dirty="0"/>
-                    </a:p>
-                  </a:txBody>
-                  <a:tcPr marL="76200" marR="76200" marT="38100" marB="38100" anchor="ctr">
-                    <a:lnL w="12700" cap="flat" cmpd="sng" algn="ctr">
-                      <a:solidFill>
-                        <a:srgbClr val="FFFFFF"/>
-                      </a:solidFill>
-                      <a:prstDash val="solid"/>
-                      <a:round/>
-                      <a:headEnd type="none" w="med" len="med"/>
-                      <a:tailEnd type="none" w="med" len="med"/>
-                    </a:lnL>
-                    <a:lnR w="12700" cap="flat" cmpd="sng" algn="ctr">
-                      <a:solidFill>
-                        <a:srgbClr val="FFFFFF"/>
-                      </a:solidFill>
-                      <a:prstDash val="solid"/>
-                      <a:round/>
-                      <a:headEnd type="none" w="med" len="med"/>
-                      <a:tailEnd type="none" w="med" len="med"/>
-                    </a:lnR>
-                    <a:lnT w="12700" cap="flat" cmpd="sng" algn="ctr">
-                      <a:solidFill>
-                        <a:srgbClr val="FFFFFF"/>
-                      </a:solidFill>
-                      <a:prstDash val="solid"/>
-                      <a:round/>
-                      <a:headEnd type="none" w="med" len="med"/>
-                      <a:tailEnd type="none" w="med" len="med"/>
-                    </a:lnT>
-                    <a:lnB w="12700" cap="flat" cmpd="sng" algn="ctr">
-                      <a:solidFill>
-                        <a:srgbClr val="FFFFFF"/>
-                      </a:solidFill>
-                      <a:prstDash val="solid"/>
-                      <a:round/>
-                      <a:headEnd type="none" w="med" len="med"/>
-                      <a:tailEnd type="none" w="med" len="med"/>
-                    </a:lnB>
-                    <a:solidFill>
-                      <a:srgbClr val="F1F5F9"/>
-                    </a:solidFill>
-                  </a:tcPr>
-                </a:tc>
-                <a:tc>
-                  <a:txBody>
-                    <a:bodyPr/>
-                    <a:lstStyle/>
-                    <a:p>
-                      <a:pPr algn="l" indent="0" marL="0">
-                        <a:buNone/>
-                      </a:pPr>
-                      <a:r>
-                        <a:rPr lang="en-US" sz="1200" dirty="0">
-                          <a:solidFill>
-                            <a:srgbClr val="1F2937"/>
-                          </a:solidFill>
-                        </a:rPr>
-                        <a:t>A05, CWE-79/352</a:t>
-                      </a:r>
-                      <a:endParaRPr lang="en-US" sz="1200" dirty="0"/>
-                    </a:p>
-                  </a:txBody>
-                  <a:tcPr marL="76200" marR="76200" marT="38100" marB="38100" anchor="ctr">
-                    <a:lnL w="12700" cap="flat" cmpd="sng" algn="ctr">
-                      <a:solidFill>
-                        <a:srgbClr val="FFFFFF"/>
-                      </a:solidFill>
-                      <a:prstDash val="solid"/>
-                      <a:round/>
-                      <a:headEnd type="none" w="med" len="med"/>
-                      <a:tailEnd type="none" w="med" len="med"/>
-                    </a:lnL>
-                    <a:lnR w="12700" cap="flat" cmpd="sng" algn="ctr">
-                      <a:solidFill>
-                        <a:srgbClr val="FFFFFF"/>
-                      </a:solidFill>
-                      <a:prstDash val="solid"/>
-                      <a:round/>
-                      <a:headEnd type="none" w="med" len="med"/>
-                      <a:tailEnd type="none" w="med" len="med"/>
-                    </a:lnR>
-                    <a:lnT w="12700" cap="flat" cmpd="sng" algn="ctr">
-                      <a:solidFill>
-                        <a:srgbClr val="FFFFFF"/>
-                      </a:solidFill>
-                      <a:prstDash val="solid"/>
-                      <a:round/>
-                      <a:headEnd type="none" w="med" len="med"/>
-                      <a:tailEnd type="none" w="med" len="med"/>
-                    </a:lnT>
-                    <a:lnB w="12700" cap="flat" cmpd="sng" algn="ctr">
-                      <a:solidFill>
-                        <a:srgbClr val="FFFFFF"/>
-                      </a:solidFill>
-                      <a:prstDash val="solid"/>
-                      <a:round/>
-                      <a:headEnd type="none" w="med" len="med"/>
-                      <a:tailEnd type="none" w="med" len="med"/>
-                    </a:lnB>
-                    <a:solidFill>
-                      <a:srgbClr val="F1F5F9"/>
-                    </a:solidFill>
-                  </a:tcPr>
-                </a:tc>
-                <a:tc>
-                  <a:txBody>
-                    <a:bodyPr/>
-                    <a:lstStyle/>
-                    <a:p>
-                      <a:pPr algn="l" indent="0" marL="0">
-                        <a:buNone/>
-                      </a:pPr>
-                      <a:r>
-                        <a:rPr lang="en-US" sz="1200" dirty="0">
-                          <a:solidFill>
-                            <a:srgbClr val="1F2937"/>
-                          </a:solidFill>
-                        </a:rPr>
-                        <a:t>encode per context; CSP</a:t>
-                      </a:r>
-                      <a:endParaRPr lang="en-US" sz="1200" dirty="0"/>
-                    </a:p>
-                  </a:txBody>
-                  <a:tcPr marL="76200" marR="76200" marT="38100" marB="38100" anchor="ctr">
-                    <a:lnL w="12700" cap="flat" cmpd="sng" algn="ctr">
-                      <a:solidFill>
-                        <a:srgbClr val="FFFFFF"/>
-                      </a:solidFill>
-                      <a:prstDash val="solid"/>
-                      <a:round/>
-                      <a:headEnd type="none" w="med" len="med"/>
-                      <a:tailEnd type="none" w="med" len="med"/>
-                    </a:lnL>
-                    <a:lnR w="12700" cap="flat" cmpd="sng" algn="ctr">
-                      <a:solidFill>
-                        <a:srgbClr val="FFFFFF"/>
-                      </a:solidFill>
-                      <a:prstDash val="solid"/>
-                      <a:round/>
-                      <a:headEnd type="none" w="med" len="med"/>
-                      <a:tailEnd type="none" w="med" len="med"/>
-                    </a:lnR>
-                    <a:lnT w="12700" cap="flat" cmpd="sng" algn="ctr">
-                      <a:solidFill>
-                        <a:srgbClr val="FFFFFF"/>
-                      </a:solidFill>
-                      <a:prstDash val="solid"/>
-                      <a:round/>
-                      <a:headEnd type="none" w="med" len="med"/>
-                      <a:tailEnd type="none" w="med" len="med"/>
-                    </a:lnT>
-                    <a:lnB w="12700" cap="flat" cmpd="sng" algn="ctr">
-                      <a:solidFill>
-                        <a:srgbClr val="FFFFFF"/>
-                      </a:solidFill>
-                      <a:prstDash val="solid"/>
-                      <a:round/>
-                      <a:headEnd type="none" w="med" len="med"/>
-                      <a:tailEnd type="none" w="med" len="med"/>
-                    </a:lnB>
-                    <a:solidFill>
-                      <a:srgbClr val="F1F5F9"/>
-                    </a:solidFill>
-                  </a:tcPr>
-                </a:tc>
-              </a:tr>
-              <a:tr h="420624">
-                <a:tc>
-                  <a:txBody>
-                    <a:bodyPr/>
-                    <a:lstStyle/>
-                    <a:p>
-                      <a:pPr algn="l" indent="0" marL="0">
-                        <a:buNone/>
-                      </a:pPr>
-                      <a:r>
-                        <a:rPr lang="en-US" sz="1200" dirty="0">
-                          <a:solidFill>
-                            <a:srgbClr val="1F2937"/>
-                          </a:solidFill>
-                        </a:rPr>
-                        <a:t>6</a:t>
-                      </a:r>
-                      <a:endParaRPr lang="en-US" sz="1200" dirty="0"/>
-                    </a:p>
-                  </a:txBody>
-                  <a:tcPr marL="76200" marR="76200" marT="38100" marB="38100" anchor="ctr">
-                    <a:lnL w="12700" cap="flat" cmpd="sng" algn="ctr">
-                      <a:solidFill>
-                        <a:srgbClr val="FFFFFF"/>
-                      </a:solidFill>
-                      <a:prstDash val="solid"/>
-                      <a:round/>
-                      <a:headEnd type="none" w="med" len="med"/>
-                      <a:tailEnd type="none" w="med" len="med"/>
-                    </a:lnL>
-                    <a:lnR w="12700" cap="flat" cmpd="sng" algn="ctr">
-                      <a:solidFill>
-                        <a:srgbClr val="FFFFFF"/>
-                      </a:solidFill>
-                      <a:prstDash val="solid"/>
-                      <a:round/>
-                      <a:headEnd type="none" w="med" len="med"/>
-                      <a:tailEnd type="none" w="med" len="med"/>
-                    </a:lnR>
-                    <a:lnT w="12700" cap="flat" cmpd="sng" algn="ctr">
-                      <a:solidFill>
-                        <a:srgbClr val="FFFFFF"/>
-                      </a:solidFill>
-                      <a:prstDash val="solid"/>
-                      <a:round/>
-                      <a:headEnd type="none" w="med" len="med"/>
-                      <a:tailEnd type="none" w="med" len="med"/>
-                    </a:lnT>
-                    <a:lnB w="12700" cap="flat" cmpd="sng" algn="ctr">
-                      <a:solidFill>
-                        <a:srgbClr val="FFFFFF"/>
-                      </a:solidFill>
-                      <a:prstDash val="solid"/>
-                      <a:round/>
-                      <a:headEnd type="none" w="med" len="med"/>
-                      <a:tailEnd type="none" w="med" len="med"/>
-                    </a:lnB>
-                    <a:solidFill>
-                      <a:srgbClr val="E8EDF3"/>
-                    </a:solidFill>
-                  </a:tcPr>
-                </a:tc>
-                <a:tc>
-                  <a:txBody>
-                    <a:bodyPr/>
-                    <a:lstStyle/>
-                    <a:p>
-                      <a:pPr algn="l" indent="0" marL="0">
-                        <a:buNone/>
-                      </a:pPr>
-                      <a:r>
-                        <a:rPr lang="en-US" sz="1200" dirty="0">
-                          <a:solidFill>
-                            <a:srgbClr val="1F2937"/>
-                          </a:solidFill>
-                        </a:rPr>
-                        <a:t>Auth &amp; access</a:t>
-                      </a:r>
-                      <a:endParaRPr lang="en-US" sz="1200" dirty="0"/>
-                    </a:p>
-                  </a:txBody>
-                  <a:tcPr marL="76200" marR="76200" marT="38100" marB="38100" anchor="ctr">
-                    <a:lnL w="12700" cap="flat" cmpd="sng" algn="ctr">
-                      <a:solidFill>
-                        <a:srgbClr val="FFFFFF"/>
-                      </a:solidFill>
-                      <a:prstDash val="solid"/>
-                      <a:round/>
-                      <a:headEnd type="none" w="med" len="med"/>
-                      <a:tailEnd type="none" w="med" len="med"/>
-                    </a:lnL>
-                    <a:lnR w="12700" cap="flat" cmpd="sng" algn="ctr">
-                      <a:solidFill>
-                        <a:srgbClr val="FFFFFF"/>
-                      </a:solidFill>
-                      <a:prstDash val="solid"/>
-                      <a:round/>
-                      <a:headEnd type="none" w="med" len="med"/>
-                      <a:tailEnd type="none" w="med" len="med"/>
-                    </a:lnR>
-                    <a:lnT w="12700" cap="flat" cmpd="sng" algn="ctr">
-                      <a:solidFill>
-                        <a:srgbClr val="FFFFFF"/>
-                      </a:solidFill>
-                      <a:prstDash val="solid"/>
-                      <a:round/>
-                      <a:headEnd type="none" w="med" len="med"/>
-                      <a:tailEnd type="none" w="med" len="med"/>
-                    </a:lnT>
-                    <a:lnB w="12700" cap="flat" cmpd="sng" algn="ctr">
-                      <a:solidFill>
-                        <a:srgbClr val="FFFFFF"/>
-                      </a:solidFill>
-                      <a:prstDash val="solid"/>
-                      <a:round/>
-                      <a:headEnd type="none" w="med" len="med"/>
-                      <a:tailEnd type="none" w="med" len="med"/>
-                    </a:lnB>
-                    <a:solidFill>
-                      <a:srgbClr val="E8EDF3"/>
-                    </a:solidFill>
-                  </a:tcPr>
-                </a:tc>
-                <a:tc>
-                  <a:txBody>
-                    <a:bodyPr/>
-                    <a:lstStyle/>
-                    <a:p>
-                      <a:pPr algn="l" indent="0" marL="0">
-                        <a:buNone/>
-                      </a:pPr>
-                      <a:r>
-                        <a:rPr lang="en-US" sz="1200" dirty="0">
-                          <a:solidFill>
-                            <a:srgbClr val="1F2937"/>
-                          </a:solidFill>
-                        </a:rPr>
-                        <a:t>A01, CWE-639/347</a:t>
-                      </a:r>
-                      <a:endParaRPr lang="en-US" sz="1200" dirty="0"/>
-                    </a:p>
-                  </a:txBody>
-                  <a:tcPr marL="76200" marR="76200" marT="38100" marB="38100" anchor="ctr">
-                    <a:lnL w="12700" cap="flat" cmpd="sng" algn="ctr">
-                      <a:solidFill>
-                        <a:srgbClr val="FFFFFF"/>
-                      </a:solidFill>
-                      <a:prstDash val="solid"/>
-                      <a:round/>
-                      <a:headEnd type="none" w="med" len="med"/>
-                      <a:tailEnd type="none" w="med" len="med"/>
-                    </a:lnL>
-                    <a:lnR w="12700" cap="flat" cmpd="sng" algn="ctr">
-                      <a:solidFill>
-                        <a:srgbClr val="FFFFFF"/>
-                      </a:solidFill>
-                      <a:prstDash val="solid"/>
-                      <a:round/>
-                      <a:headEnd type="none" w="med" len="med"/>
-                      <a:tailEnd type="none" w="med" len="med"/>
-                    </a:lnR>
-                    <a:lnT w="12700" cap="flat" cmpd="sng" algn="ctr">
-                      <a:solidFill>
-                        <a:srgbClr val="FFFFFF"/>
-                      </a:solidFill>
-                      <a:prstDash val="solid"/>
-                      <a:round/>
-                      <a:headEnd type="none" w="med" len="med"/>
-                      <a:tailEnd type="none" w="med" len="med"/>
-                    </a:lnT>
-                    <a:lnB w="12700" cap="flat" cmpd="sng" algn="ctr">
-                      <a:solidFill>
-                        <a:srgbClr val="FFFFFF"/>
-                      </a:solidFill>
-                      <a:prstDash val="solid"/>
-                      <a:round/>
-                      <a:headEnd type="none" w="med" len="med"/>
-                      <a:tailEnd type="none" w="med" len="med"/>
-                    </a:lnB>
-                    <a:solidFill>
-                      <a:srgbClr val="E8EDF3"/>
-                    </a:solidFill>
-                  </a:tcPr>
-                </a:tc>
-                <a:tc>
-                  <a:txBody>
-                    <a:bodyPr/>
-                    <a:lstStyle/>
-                    <a:p>
-                      <a:pPr algn="l" indent="0" marL="0">
-                        <a:buNone/>
-                      </a:pPr>
-                      <a:r>
-                        <a:rPr lang="en-US" sz="1200" dirty="0">
-                          <a:solidFill>
-                            <a:srgbClr val="1F2937"/>
-                          </a:solidFill>
-                        </a:rPr>
-                        <a:t>authorize every request</a:t>
-                      </a:r>
-                      <a:endParaRPr lang="en-US" sz="1200" dirty="0"/>
-                    </a:p>
-                  </a:txBody>
-                  <a:tcPr marL="76200" marR="76200" marT="38100" marB="38100" anchor="ctr">
-                    <a:lnL w="12700" cap="flat" cmpd="sng" algn="ctr">
-                      <a:solidFill>
-                        <a:srgbClr val="FFFFFF"/>
-                      </a:solidFill>
-                      <a:prstDash val="solid"/>
-                      <a:round/>
-                      <a:headEnd type="none" w="med" len="med"/>
-                      <a:tailEnd type="none" w="med" len="med"/>
-                    </a:lnL>
-                    <a:lnR w="12700" cap="flat" cmpd="sng" algn="ctr">
-                      <a:solidFill>
-                        <a:srgbClr val="FFFFFF"/>
-                      </a:solidFill>
-                      <a:prstDash val="solid"/>
-                      <a:round/>
-                      <a:headEnd type="none" w="med" len="med"/>
-                      <a:tailEnd type="none" w="med" len="med"/>
-                    </a:lnR>
-                    <a:lnT w="12700" cap="flat" cmpd="sng" algn="ctr">
-                      <a:solidFill>
-                        <a:srgbClr val="FFFFFF"/>
-                      </a:solidFill>
-                      <a:prstDash val="solid"/>
-                      <a:round/>
-                      <a:headEnd type="none" w="med" len="med"/>
-                      <a:tailEnd type="none" w="med" len="med"/>
-                    </a:lnT>
-                    <a:lnB w="12700" cap="flat" cmpd="sng" algn="ctr">
-                      <a:solidFill>
-                        <a:srgbClr val="FFFFFF"/>
-                      </a:solidFill>
-                      <a:prstDash val="solid"/>
-                      <a:round/>
-                      <a:headEnd type="none" w="med" len="med"/>
-                      <a:tailEnd type="none" w="med" len="med"/>
-                    </a:lnB>
-                    <a:solidFill>
-                      <a:srgbClr val="E8EDF3"/>
-                    </a:solidFill>
-                  </a:tcPr>
-                </a:tc>
-              </a:tr>
-            </a:tbl>
-          </a:graphicData>
-        </a:graphic>
-      </p:graphicFrame>
-      <p:sp>
-        <p:nvSpPr>
-          <p:cNvPr id="6" name="Text 2"/>
+      <p:sp>
+        <p:nvSpPr>
+          <p:cNvPr id="5" name="Text 2"/>
+          <p:cNvSpPr/>
+          <p:nvPr/>
+        </p:nvSpPr>
+        <p:spPr>
+          <a:xfrm>
+            <a:off x="548640" y="1325880"/>
+            <a:ext cx="8046720" cy="2743200"/>
+          </a:xfrm>
+          <a:prstGeom prst="rect">
+            <a:avLst/>
+          </a:prstGeom>
+          <a:noFill/>
+          <a:ln/>
+        </p:spPr>
+        <p:txBody>
+          <a:bodyPr wrap="square" lIns="0" tIns="0" rIns="0" bIns="0" rtlCol="0" anchor="t">
+            <a:normAutofit/>
+          </a:bodyPr>
+          <a:lstStyle/>
+          <a:p>
+            <a:pPr indent="0" marL="0">
+              <a:buNone/>
+            </a:pPr>
+            <a:r>
+              <a:rPr lang="en-US" sz="1400" dirty="0">
+                <a:solidFill>
+                  <a:srgbClr val="1F2937"/>
+                </a:solidFill>
+                <a:latin typeface="Calibri" pitchFamily="34" charset="0"/>
+                <a:ea typeface="Calibri" pitchFamily="34" charset="-122"/>
+                <a:cs typeface="Calibri" pitchFamily="34" charset="-120"/>
+              </a:rPr>
+              <a:t>See diagram: A revision map of weeks 1 to 6: untrusted input crosses a trust boundary toward a sink, and every week places its control exactly at that crossing. Week 1 threat modeling: draw the DFD, run STRIDE at each crossing. Week 2 SDLC/tooling: Semgrep, Gitleaks, DAST and fuzzing catch what rides through commit/build/run unseen. Week 3 crypto: argon2id + AES-GCM with the key from the environment, not MD5/ECB with a fixed key. Week 4 injection: a parameterized query, no shell, an allow-list on the host. Week 5 XSS/CSRF: contextual encoding, a strict CSP, SameSite plus a real CSRF token. Week 6 auth: deny by default, a server-side owner check, and verifying the JWT's algorithm and signature. (web only)</a:t>
+            </a:r>
+            <a:endParaRPr lang="en-US" sz="1400" dirty="0"/>
+          </a:p>
+        </p:txBody>
+      </p:sp>
+      <p:sp>
+        <p:nvSpPr>
+          <p:cNvPr id="6" name="Text 3"/>
           <p:cNvSpPr/>
           <p:nvPr/>
         </p:nvSpPr>
